--- a/docs/overview.pptx
+++ b/docs/overview.pptx
@@ -3336,6 +3336,98 @@
         <p:spPr>
           <a:xfrm>
             <a:off x="1759226" y="1212574"/>
+            <a:ext cx="1550504" cy="785191"/>
+          </a:xfrm>
+          <a:prstGeom prst="rect">
+            <a:avLst/>
+          </a:prstGeom>
+        </p:spPr>
+        <p:style>
+          <a:lnRef idx="2">
+            <a:schemeClr val="accent1">
+              <a:shade val="15000"/>
+            </a:schemeClr>
+          </a:lnRef>
+          <a:fillRef idx="1">
+            <a:schemeClr val="accent1"/>
+          </a:fillRef>
+          <a:effectRef idx="0">
+            <a:schemeClr val="accent1"/>
+          </a:effectRef>
+          <a:fontRef idx="minor">
+            <a:schemeClr val="lt1"/>
+          </a:fontRef>
+        </p:style>
+        <p:txBody>
+          <a:bodyPr rtlCol="0" anchor="ctr"/>
+          <a:lstStyle/>
+          <a:p>
+            <a:pPr algn="ctr"/>
+            <a:endParaRPr lang="zh-CN" altLang="en-US"/>
+          </a:p>
+        </p:txBody>
+      </p:sp>
+      <p:sp>
+        <p:nvSpPr>
+          <p:cNvPr id="6" name="矩形 5">
+            <a:extLst>
+              <a:ext uri="{FF2B5EF4-FFF2-40B4-BE49-F238E27FC236}">
+                <a16:creationId xmlns:a16="http://schemas.microsoft.com/office/drawing/2014/main" id="{C81BC4E6-8331-AEDE-3946-7F2EAA6E5774}"/>
+              </a:ext>
+            </a:extLst>
+          </p:cNvPr>
+          <p:cNvSpPr/>
+          <p:nvPr/>
+        </p:nvSpPr>
+        <p:spPr>
+          <a:xfrm>
+            <a:off x="1759226" y="2080591"/>
+            <a:ext cx="1550504" cy="785191"/>
+          </a:xfrm>
+          <a:prstGeom prst="rect">
+            <a:avLst/>
+          </a:prstGeom>
+        </p:spPr>
+        <p:style>
+          <a:lnRef idx="2">
+            <a:schemeClr val="accent1">
+              <a:shade val="15000"/>
+            </a:schemeClr>
+          </a:lnRef>
+          <a:fillRef idx="1">
+            <a:schemeClr val="accent1"/>
+          </a:fillRef>
+          <a:effectRef idx="0">
+            <a:schemeClr val="accent1"/>
+          </a:effectRef>
+          <a:fontRef idx="minor">
+            <a:schemeClr val="lt1"/>
+          </a:fontRef>
+        </p:style>
+        <p:txBody>
+          <a:bodyPr rtlCol="0" anchor="ctr"/>
+          <a:lstStyle/>
+          <a:p>
+            <a:pPr algn="ctr"/>
+            <a:endParaRPr lang="zh-CN" altLang="en-US"/>
+          </a:p>
+        </p:txBody>
+      </p:sp>
+      <p:sp>
+        <p:nvSpPr>
+          <p:cNvPr id="7" name="矩形 6">
+            <a:extLst>
+              <a:ext uri="{FF2B5EF4-FFF2-40B4-BE49-F238E27FC236}">
+                <a16:creationId xmlns:a16="http://schemas.microsoft.com/office/drawing/2014/main" id="{EA8275DF-53D8-4E1E-AA98-EB8720A2D58A}"/>
+              </a:ext>
+            </a:extLst>
+          </p:cNvPr>
+          <p:cNvSpPr/>
+          <p:nvPr/>
+        </p:nvSpPr>
+        <p:spPr>
+          <a:xfrm>
+            <a:off x="1759226" y="3036404"/>
             <a:ext cx="1550504" cy="785191"/>
           </a:xfrm>
           <a:prstGeom prst="rect">

--- a/docs/overview.pptx
+++ b/docs/overview.pptx
@@ -3323,6 +3323,52 @@
       </p:grpSpPr>
       <p:sp>
         <p:nvSpPr>
+          <p:cNvPr id="8" name="矩形 7">
+            <a:extLst>
+              <a:ext uri="{FF2B5EF4-FFF2-40B4-BE49-F238E27FC236}">
+                <a16:creationId xmlns:a16="http://schemas.microsoft.com/office/drawing/2014/main" id="{7FC3AC08-1B62-48A1-797F-2AAA0B113715}"/>
+              </a:ext>
+            </a:extLst>
+          </p:cNvPr>
+          <p:cNvSpPr/>
+          <p:nvPr/>
+        </p:nvSpPr>
+        <p:spPr>
+          <a:xfrm>
+            <a:off x="1289602" y="631134"/>
+            <a:ext cx="2489752" cy="3250096"/>
+          </a:xfrm>
+          <a:prstGeom prst="rect">
+            <a:avLst/>
+          </a:prstGeom>
+        </p:spPr>
+        <p:style>
+          <a:lnRef idx="2">
+            <a:schemeClr val="accent2">
+              <a:shade val="15000"/>
+            </a:schemeClr>
+          </a:lnRef>
+          <a:fillRef idx="1">
+            <a:schemeClr val="accent2"/>
+          </a:fillRef>
+          <a:effectRef idx="0">
+            <a:schemeClr val="accent2"/>
+          </a:effectRef>
+          <a:fontRef idx="minor">
+            <a:schemeClr val="lt1"/>
+          </a:fontRef>
+        </p:style>
+        <p:txBody>
+          <a:bodyPr rtlCol="0" anchor="ctr"/>
+          <a:lstStyle/>
+          <a:p>
+            <a:pPr algn="ctr"/>
+            <a:endParaRPr lang="zh-CN" altLang="en-US"/>
+          </a:p>
+        </p:txBody>
+      </p:sp>
+      <p:sp>
+        <p:nvSpPr>
           <p:cNvPr id="4" name="矩形 3">
             <a:extLst>
               <a:ext uri="{FF2B5EF4-FFF2-40B4-BE49-F238E27FC236}">
@@ -3427,7 +3473,7 @@
         </p:nvSpPr>
         <p:spPr>
           <a:xfrm>
-            <a:off x="1759226" y="3036404"/>
+            <a:off x="1759226" y="2948608"/>
             <a:ext cx="1550504" cy="785191"/>
           </a:xfrm>
           <a:prstGeom prst="rect">

--- a/docs/overview.pptx
+++ b/docs/overview.pptx
@@ -4,6 +4,9 @@
   <p:sldMasterIdLst>
     <p:sldMasterId id="2147483648" r:id="rId1"/>
   </p:sldMasterIdLst>
+  <p:notesMasterIdLst>
+    <p:notesMasterId r:id="rId3"/>
+  </p:notesMasterIdLst>
   <p:sldIdLst>
     <p:sldId id="256" r:id="rId2"/>
   </p:sldIdLst>
@@ -104,7 +107,445 @@
       </a:defRPr>
     </a:lvl9pPr>
   </p:defaultTextStyle>
+  <p:extLst>
+    <p:ext uri="{EFAFB233-063F-42B5-8137-9DF3F51BA10A}">
+      <p15:sldGuideLst xmlns:p15="http://schemas.microsoft.com/office/powerpoint/2012/main"/>
+    </p:ext>
+  </p:extLst>
 </p:presentation>
+</file>
+
+<file path=ppt/notesMasters/notesMaster1.xml><?xml version="1.0" encoding="utf-8"?>
+<p:notesMaster xmlns:a="http://schemas.openxmlformats.org/drawingml/2006/main" xmlns:r="http://schemas.openxmlformats.org/officeDocument/2006/relationships" xmlns:p="http://schemas.openxmlformats.org/presentationml/2006/main">
+  <p:cSld>
+    <p:bg>
+      <p:bgRef idx="1001">
+        <a:schemeClr val="bg1"/>
+      </p:bgRef>
+    </p:bg>
+    <p:spTree>
+      <p:nvGrpSpPr>
+        <p:cNvPr id="1" name=""/>
+        <p:cNvGrpSpPr/>
+        <p:nvPr/>
+      </p:nvGrpSpPr>
+      <p:grpSpPr>
+        <a:xfrm>
+          <a:off x="0" y="0"/>
+          <a:ext cx="0" cy="0"/>
+          <a:chOff x="0" y="0"/>
+          <a:chExt cx="0" cy="0"/>
+        </a:xfrm>
+      </p:grpSpPr>
+      <p:sp>
+        <p:nvSpPr>
+          <p:cNvPr id="2" name="页眉占位符 1"/>
+          <p:cNvSpPr>
+            <a:spLocks noGrp="1"/>
+          </p:cNvSpPr>
+          <p:nvPr>
+            <p:ph type="hdr" sz="quarter"/>
+          </p:nvPr>
+        </p:nvSpPr>
+        <p:spPr>
+          <a:xfrm>
+            <a:off x="0" y="0"/>
+            <a:ext cx="2971800" cy="458788"/>
+          </a:xfrm>
+          <a:prstGeom prst="rect">
+            <a:avLst/>
+          </a:prstGeom>
+        </p:spPr>
+        <p:txBody>
+          <a:bodyPr vert="horz" lIns="91440" tIns="45720" rIns="91440" bIns="45720" rtlCol="0"/>
+          <a:lstStyle>
+            <a:lvl1pPr algn="l">
+              <a:defRPr sz="1200"/>
+            </a:lvl1pPr>
+          </a:lstStyle>
+          <a:p>
+            <a:endParaRPr lang="zh-CN" altLang="en-US"/>
+          </a:p>
+        </p:txBody>
+      </p:sp>
+      <p:sp>
+        <p:nvSpPr>
+          <p:cNvPr id="3" name="日期占位符 2"/>
+          <p:cNvSpPr>
+            <a:spLocks noGrp="1"/>
+          </p:cNvSpPr>
+          <p:nvPr>
+            <p:ph type="dt" idx="1"/>
+          </p:nvPr>
+        </p:nvSpPr>
+        <p:spPr>
+          <a:xfrm>
+            <a:off x="3884613" y="0"/>
+            <a:ext cx="2971800" cy="458788"/>
+          </a:xfrm>
+          <a:prstGeom prst="rect">
+            <a:avLst/>
+          </a:prstGeom>
+        </p:spPr>
+        <p:txBody>
+          <a:bodyPr vert="horz" lIns="91440" tIns="45720" rIns="91440" bIns="45720" rtlCol="0"/>
+          <a:lstStyle>
+            <a:lvl1pPr algn="r">
+              <a:defRPr sz="1200"/>
+            </a:lvl1pPr>
+          </a:lstStyle>
+          <a:p>
+            <a:fld id="{CAC5895B-3708-46E1-A199-8735536F71F9}" type="datetimeFigureOut">
+              <a:rPr lang="zh-CN" altLang="en-US" smtClean="0"/>
+              <a:t>2026/2/23</a:t>
+            </a:fld>
+            <a:endParaRPr lang="zh-CN" altLang="en-US"/>
+          </a:p>
+        </p:txBody>
+      </p:sp>
+      <p:sp>
+        <p:nvSpPr>
+          <p:cNvPr id="4" name="幻灯片图像占位符 3"/>
+          <p:cNvSpPr>
+            <a:spLocks noGrp="1" noRot="1" noChangeAspect="1"/>
+          </p:cNvSpPr>
+          <p:nvPr>
+            <p:ph type="sldImg" idx="2"/>
+          </p:nvPr>
+        </p:nvSpPr>
+        <p:spPr>
+          <a:xfrm>
+            <a:off x="685800" y="1143000"/>
+            <a:ext cx="5486400" cy="3086100"/>
+          </a:xfrm>
+          <a:prstGeom prst="rect">
+            <a:avLst/>
+          </a:prstGeom>
+          <a:noFill/>
+          <a:ln w="12700">
+            <a:solidFill>
+              <a:prstClr val="black"/>
+            </a:solidFill>
+          </a:ln>
+        </p:spPr>
+        <p:txBody>
+          <a:bodyPr vert="horz" lIns="91440" tIns="45720" rIns="91440" bIns="45720" rtlCol="0" anchor="ctr"/>
+          <a:lstStyle/>
+          <a:p>
+            <a:endParaRPr lang="zh-CN" altLang="en-US"/>
+          </a:p>
+        </p:txBody>
+      </p:sp>
+      <p:sp>
+        <p:nvSpPr>
+          <p:cNvPr id="5" name="备注占位符 4"/>
+          <p:cNvSpPr>
+            <a:spLocks noGrp="1"/>
+          </p:cNvSpPr>
+          <p:nvPr>
+            <p:ph type="body" sz="quarter" idx="3"/>
+          </p:nvPr>
+        </p:nvSpPr>
+        <p:spPr>
+          <a:xfrm>
+            <a:off x="685800" y="4400550"/>
+            <a:ext cx="5486400" cy="3600450"/>
+          </a:xfrm>
+          <a:prstGeom prst="rect">
+            <a:avLst/>
+          </a:prstGeom>
+        </p:spPr>
+        <p:txBody>
+          <a:bodyPr vert="horz" lIns="91440" tIns="45720" rIns="91440" bIns="45720" rtlCol="0"/>
+          <a:lstStyle/>
+          <a:p>
+            <a:pPr lvl="0"/>
+            <a:r>
+              <a:rPr lang="zh-CN" altLang="en-US"/>
+              <a:t>单击此处编辑母版文本样式</a:t>
+            </a:r>
+          </a:p>
+          <a:p>
+            <a:pPr lvl="1"/>
+            <a:r>
+              <a:rPr lang="zh-CN" altLang="en-US"/>
+              <a:t>二级</a:t>
+            </a:r>
+          </a:p>
+          <a:p>
+            <a:pPr lvl="2"/>
+            <a:r>
+              <a:rPr lang="zh-CN" altLang="en-US"/>
+              <a:t>三级</a:t>
+            </a:r>
+          </a:p>
+          <a:p>
+            <a:pPr lvl="3"/>
+            <a:r>
+              <a:rPr lang="zh-CN" altLang="en-US"/>
+              <a:t>四级</a:t>
+            </a:r>
+          </a:p>
+          <a:p>
+            <a:pPr lvl="4"/>
+            <a:r>
+              <a:rPr lang="zh-CN" altLang="en-US"/>
+              <a:t>五级</a:t>
+            </a:r>
+          </a:p>
+        </p:txBody>
+      </p:sp>
+      <p:sp>
+        <p:nvSpPr>
+          <p:cNvPr id="6" name="页脚占位符 5"/>
+          <p:cNvSpPr>
+            <a:spLocks noGrp="1"/>
+          </p:cNvSpPr>
+          <p:nvPr>
+            <p:ph type="ftr" sz="quarter" idx="4"/>
+          </p:nvPr>
+        </p:nvSpPr>
+        <p:spPr>
+          <a:xfrm>
+            <a:off x="0" y="8685213"/>
+            <a:ext cx="2971800" cy="458787"/>
+          </a:xfrm>
+          <a:prstGeom prst="rect">
+            <a:avLst/>
+          </a:prstGeom>
+        </p:spPr>
+        <p:txBody>
+          <a:bodyPr vert="horz" lIns="91440" tIns="45720" rIns="91440" bIns="45720" rtlCol="0" anchor="b"/>
+          <a:lstStyle>
+            <a:lvl1pPr algn="l">
+              <a:defRPr sz="1200"/>
+            </a:lvl1pPr>
+          </a:lstStyle>
+          <a:p>
+            <a:endParaRPr lang="zh-CN" altLang="en-US"/>
+          </a:p>
+        </p:txBody>
+      </p:sp>
+      <p:sp>
+        <p:nvSpPr>
+          <p:cNvPr id="7" name="灯片编号占位符 6"/>
+          <p:cNvSpPr>
+            <a:spLocks noGrp="1"/>
+          </p:cNvSpPr>
+          <p:nvPr>
+            <p:ph type="sldNum" sz="quarter" idx="5"/>
+          </p:nvPr>
+        </p:nvSpPr>
+        <p:spPr>
+          <a:xfrm>
+            <a:off x="3884613" y="8685213"/>
+            <a:ext cx="2971800" cy="458787"/>
+          </a:xfrm>
+          <a:prstGeom prst="rect">
+            <a:avLst/>
+          </a:prstGeom>
+        </p:spPr>
+        <p:txBody>
+          <a:bodyPr vert="horz" lIns="91440" tIns="45720" rIns="91440" bIns="45720" rtlCol="0" anchor="b"/>
+          <a:lstStyle>
+            <a:lvl1pPr algn="r">
+              <a:defRPr sz="1200"/>
+            </a:lvl1pPr>
+          </a:lstStyle>
+          <a:p>
+            <a:fld id="{6AB730D5-1C7C-4557-8722-3813F1ECD0F3}" type="slidenum">
+              <a:rPr lang="zh-CN" altLang="en-US" smtClean="0"/>
+              <a:t>‹#›</a:t>
+            </a:fld>
+            <a:endParaRPr lang="zh-CN" altLang="en-US"/>
+          </a:p>
+        </p:txBody>
+      </p:sp>
+    </p:spTree>
+    <p:extLst>
+      <p:ext uri="{BB962C8B-B14F-4D97-AF65-F5344CB8AC3E}">
+        <p14:creationId xmlns:p14="http://schemas.microsoft.com/office/powerpoint/2010/main" val="4177833482"/>
+      </p:ext>
+    </p:extLst>
+  </p:cSld>
+  <p:clrMap bg1="lt1" tx1="dk1" bg2="lt2" tx2="dk2" accent1="accent1" accent2="accent2" accent3="accent3" accent4="accent4" accent5="accent5" accent6="accent6" hlink="hlink" folHlink="folHlink"/>
+  <p:notesStyle>
+    <a:lvl1pPr marL="0" algn="l" defTabSz="914400" rtl="0" eaLnBrk="1" latinLnBrk="0" hangingPunct="1">
+      <a:defRPr sz="1200" kern="1200">
+        <a:solidFill>
+          <a:schemeClr val="tx1"/>
+        </a:solidFill>
+        <a:latin typeface="+mn-lt"/>
+        <a:ea typeface="+mn-ea"/>
+        <a:cs typeface="+mn-cs"/>
+      </a:defRPr>
+    </a:lvl1pPr>
+    <a:lvl2pPr marL="457200" algn="l" defTabSz="914400" rtl="0" eaLnBrk="1" latinLnBrk="0" hangingPunct="1">
+      <a:defRPr sz="1200" kern="1200">
+        <a:solidFill>
+          <a:schemeClr val="tx1"/>
+        </a:solidFill>
+        <a:latin typeface="+mn-lt"/>
+        <a:ea typeface="+mn-ea"/>
+        <a:cs typeface="+mn-cs"/>
+      </a:defRPr>
+    </a:lvl2pPr>
+    <a:lvl3pPr marL="914400" algn="l" defTabSz="914400" rtl="0" eaLnBrk="1" latinLnBrk="0" hangingPunct="1">
+      <a:defRPr sz="1200" kern="1200">
+        <a:solidFill>
+          <a:schemeClr val="tx1"/>
+        </a:solidFill>
+        <a:latin typeface="+mn-lt"/>
+        <a:ea typeface="+mn-ea"/>
+        <a:cs typeface="+mn-cs"/>
+      </a:defRPr>
+    </a:lvl3pPr>
+    <a:lvl4pPr marL="1371600" algn="l" defTabSz="914400" rtl="0" eaLnBrk="1" latinLnBrk="0" hangingPunct="1">
+      <a:defRPr sz="1200" kern="1200">
+        <a:solidFill>
+          <a:schemeClr val="tx1"/>
+        </a:solidFill>
+        <a:latin typeface="+mn-lt"/>
+        <a:ea typeface="+mn-ea"/>
+        <a:cs typeface="+mn-cs"/>
+      </a:defRPr>
+    </a:lvl4pPr>
+    <a:lvl5pPr marL="1828800" algn="l" defTabSz="914400" rtl="0" eaLnBrk="1" latinLnBrk="0" hangingPunct="1">
+      <a:defRPr sz="1200" kern="1200">
+        <a:solidFill>
+          <a:schemeClr val="tx1"/>
+        </a:solidFill>
+        <a:latin typeface="+mn-lt"/>
+        <a:ea typeface="+mn-ea"/>
+        <a:cs typeface="+mn-cs"/>
+      </a:defRPr>
+    </a:lvl5pPr>
+    <a:lvl6pPr marL="2286000" algn="l" defTabSz="914400" rtl="0" eaLnBrk="1" latinLnBrk="0" hangingPunct="1">
+      <a:defRPr sz="1200" kern="1200">
+        <a:solidFill>
+          <a:schemeClr val="tx1"/>
+        </a:solidFill>
+        <a:latin typeface="+mn-lt"/>
+        <a:ea typeface="+mn-ea"/>
+        <a:cs typeface="+mn-cs"/>
+      </a:defRPr>
+    </a:lvl6pPr>
+    <a:lvl7pPr marL="2743200" algn="l" defTabSz="914400" rtl="0" eaLnBrk="1" latinLnBrk="0" hangingPunct="1">
+      <a:defRPr sz="1200" kern="1200">
+        <a:solidFill>
+          <a:schemeClr val="tx1"/>
+        </a:solidFill>
+        <a:latin typeface="+mn-lt"/>
+        <a:ea typeface="+mn-ea"/>
+        <a:cs typeface="+mn-cs"/>
+      </a:defRPr>
+    </a:lvl7pPr>
+    <a:lvl8pPr marL="3200400" algn="l" defTabSz="914400" rtl="0" eaLnBrk="1" latinLnBrk="0" hangingPunct="1">
+      <a:defRPr sz="1200" kern="1200">
+        <a:solidFill>
+          <a:schemeClr val="tx1"/>
+        </a:solidFill>
+        <a:latin typeface="+mn-lt"/>
+        <a:ea typeface="+mn-ea"/>
+        <a:cs typeface="+mn-cs"/>
+      </a:defRPr>
+    </a:lvl8pPr>
+    <a:lvl9pPr marL="3657600" algn="l" defTabSz="914400" rtl="0" eaLnBrk="1" latinLnBrk="0" hangingPunct="1">
+      <a:defRPr sz="1200" kern="1200">
+        <a:solidFill>
+          <a:schemeClr val="tx1"/>
+        </a:solidFill>
+        <a:latin typeface="+mn-lt"/>
+        <a:ea typeface="+mn-ea"/>
+        <a:cs typeface="+mn-cs"/>
+      </a:defRPr>
+    </a:lvl9pPr>
+  </p:notesStyle>
+</p:notesMaster>
+</file>
+
+<file path=ppt/notesSlides/notesSlide1.xml><?xml version="1.0" encoding="utf-8"?>
+<p:notes xmlns:a="http://schemas.openxmlformats.org/drawingml/2006/main" xmlns:r="http://schemas.openxmlformats.org/officeDocument/2006/relationships" xmlns:p="http://schemas.openxmlformats.org/presentationml/2006/main">
+  <p:cSld>
+    <p:spTree>
+      <p:nvGrpSpPr>
+        <p:cNvPr id="1" name=""/>
+        <p:cNvGrpSpPr/>
+        <p:nvPr/>
+      </p:nvGrpSpPr>
+      <p:grpSpPr>
+        <a:xfrm>
+          <a:off x="0" y="0"/>
+          <a:ext cx="0" cy="0"/>
+          <a:chOff x="0" y="0"/>
+          <a:chExt cx="0" cy="0"/>
+        </a:xfrm>
+      </p:grpSpPr>
+      <p:sp>
+        <p:nvSpPr>
+          <p:cNvPr id="2" name="幻灯片图像占位符 1"/>
+          <p:cNvSpPr>
+            <a:spLocks noGrp="1" noRot="1" noChangeAspect="1"/>
+          </p:cNvSpPr>
+          <p:nvPr>
+            <p:ph type="sldImg"/>
+          </p:nvPr>
+        </p:nvSpPr>
+        <p:spPr/>
+      </p:sp>
+      <p:sp>
+        <p:nvSpPr>
+          <p:cNvPr id="3" name="备注占位符 2"/>
+          <p:cNvSpPr>
+            <a:spLocks noGrp="1"/>
+          </p:cNvSpPr>
+          <p:nvPr>
+            <p:ph type="body" idx="1"/>
+          </p:nvPr>
+        </p:nvSpPr>
+        <p:spPr/>
+        <p:txBody>
+          <a:bodyPr/>
+          <a:lstStyle/>
+          <a:p>
+            <a:endParaRPr lang="zh-CN" altLang="en-US" dirty="0"/>
+          </a:p>
+        </p:txBody>
+      </p:sp>
+      <p:sp>
+        <p:nvSpPr>
+          <p:cNvPr id="4" name="灯片编号占位符 3"/>
+          <p:cNvSpPr>
+            <a:spLocks noGrp="1"/>
+          </p:cNvSpPr>
+          <p:nvPr>
+            <p:ph type="sldNum" sz="quarter" idx="5"/>
+          </p:nvPr>
+        </p:nvSpPr>
+        <p:spPr/>
+        <p:txBody>
+          <a:bodyPr/>
+          <a:lstStyle/>
+          <a:p>
+            <a:fld id="{6AB730D5-1C7C-4557-8722-3813F1ECD0F3}" type="slidenum">
+              <a:rPr lang="zh-CN" altLang="en-US" smtClean="0"/>
+              <a:t>1</a:t>
+            </a:fld>
+            <a:endParaRPr lang="zh-CN" altLang="en-US"/>
+          </a:p>
+        </p:txBody>
+      </p:sp>
+    </p:spTree>
+    <p:extLst>
+      <p:ext uri="{BB962C8B-B14F-4D97-AF65-F5344CB8AC3E}">
+        <p14:creationId xmlns:p14="http://schemas.microsoft.com/office/powerpoint/2010/main" val="2581580747"/>
+      </p:ext>
+    </p:extLst>
+  </p:cSld>
+  <p:clrMapOvr>
+    <a:masterClrMapping/>
+  </p:clrMapOvr>
+</p:notes>
 </file>
 
 <file path=ppt/slideLayouts/slideLayout1.xml><?xml version="1.0" encoding="utf-8"?>
@@ -3502,6 +3943,292 @@
           <a:p>
             <a:pPr algn="ctr"/>
             <a:endParaRPr lang="zh-CN" altLang="en-US"/>
+          </a:p>
+        </p:txBody>
+      </p:sp>
+      <p:sp>
+        <p:nvSpPr>
+          <p:cNvPr id="2" name="文本框 1">
+            <a:extLst>
+              <a:ext uri="{FF2B5EF4-FFF2-40B4-BE49-F238E27FC236}">
+                <a16:creationId xmlns:a16="http://schemas.microsoft.com/office/drawing/2014/main" id="{A43141FA-B24C-18E7-D130-E91BF5CF010E}"/>
+              </a:ext>
+            </a:extLst>
+          </p:cNvPr>
+          <p:cNvSpPr txBox="1"/>
+          <p:nvPr/>
+        </p:nvSpPr>
+        <p:spPr>
+          <a:xfrm>
+            <a:off x="2087217" y="695811"/>
+            <a:ext cx="1396448" cy="369332"/>
+          </a:xfrm>
+          <a:prstGeom prst="rect">
+            <a:avLst/>
+          </a:prstGeom>
+          <a:noFill/>
+        </p:spPr>
+        <p:txBody>
+          <a:bodyPr wrap="square" rtlCol="0">
+            <a:spAutoFit/>
+          </a:bodyPr>
+          <a:lstStyle/>
+          <a:p>
+            <a:r>
+              <a:rPr lang="en-US" altLang="zh-CN" dirty="0">
+                <a:latin typeface="MS UI Gothic" panose="020B0600070205080204" pitchFamily="34" charset="-128"/>
+                <a:ea typeface="MS UI Gothic" panose="020B0600070205080204" pitchFamily="34" charset="-128"/>
+              </a:rPr>
+              <a:t>INPUT</a:t>
+            </a:r>
+            <a:endParaRPr lang="zh-CN" altLang="en-US" dirty="0">
+              <a:latin typeface="MS UI Gothic" panose="020B0600070205080204" pitchFamily="34" charset="-128"/>
+              <a:ea typeface="MS UI Gothic" panose="020B0600070205080204" pitchFamily="34" charset="-128"/>
+            </a:endParaRPr>
+          </a:p>
+        </p:txBody>
+      </p:sp>
+      <p:sp>
+        <p:nvSpPr>
+          <p:cNvPr id="3" name="矩形 2">
+            <a:extLst>
+              <a:ext uri="{FF2B5EF4-FFF2-40B4-BE49-F238E27FC236}">
+                <a16:creationId xmlns:a16="http://schemas.microsoft.com/office/drawing/2014/main" id="{414C27B1-FD70-8F48-D8C5-EAFAB2532D61}"/>
+              </a:ext>
+            </a:extLst>
+          </p:cNvPr>
+          <p:cNvSpPr/>
+          <p:nvPr/>
+        </p:nvSpPr>
+        <p:spPr>
+          <a:xfrm>
+            <a:off x="9064486" y="506895"/>
+            <a:ext cx="2594113" cy="5928691"/>
+          </a:xfrm>
+          <a:prstGeom prst="rect">
+            <a:avLst/>
+          </a:prstGeom>
+        </p:spPr>
+        <p:style>
+          <a:lnRef idx="2">
+            <a:schemeClr val="accent2">
+              <a:shade val="15000"/>
+            </a:schemeClr>
+          </a:lnRef>
+          <a:fillRef idx="1">
+            <a:schemeClr val="accent2"/>
+          </a:fillRef>
+          <a:effectRef idx="0">
+            <a:schemeClr val="accent2"/>
+          </a:effectRef>
+          <a:fontRef idx="minor">
+            <a:schemeClr val="lt1"/>
+          </a:fontRef>
+        </p:style>
+        <p:txBody>
+          <a:bodyPr rtlCol="0" anchor="ctr"/>
+          <a:lstStyle/>
+          <a:p>
+            <a:pPr algn="ctr"/>
+            <a:endParaRPr lang="zh-CN" altLang="en-US"/>
+          </a:p>
+        </p:txBody>
+      </p:sp>
+      <p:sp>
+        <p:nvSpPr>
+          <p:cNvPr id="5" name="矩形 4">
+            <a:extLst>
+              <a:ext uri="{FF2B5EF4-FFF2-40B4-BE49-F238E27FC236}">
+                <a16:creationId xmlns:a16="http://schemas.microsoft.com/office/drawing/2014/main" id="{90363CCF-F9C6-2297-5930-700E203DDB8F}"/>
+              </a:ext>
+            </a:extLst>
+          </p:cNvPr>
+          <p:cNvSpPr/>
+          <p:nvPr/>
+        </p:nvSpPr>
+        <p:spPr>
+          <a:xfrm>
+            <a:off x="9235934" y="979005"/>
+            <a:ext cx="2251213" cy="3841475"/>
+          </a:xfrm>
+          <a:prstGeom prst="rect">
+            <a:avLst/>
+          </a:prstGeom>
+        </p:spPr>
+        <p:style>
+          <a:lnRef idx="2">
+            <a:schemeClr val="accent6">
+              <a:shade val="15000"/>
+            </a:schemeClr>
+          </a:lnRef>
+          <a:fillRef idx="1">
+            <a:schemeClr val="accent6"/>
+          </a:fillRef>
+          <a:effectRef idx="0">
+            <a:schemeClr val="accent6"/>
+          </a:effectRef>
+          <a:fontRef idx="minor">
+            <a:schemeClr val="lt1"/>
+          </a:fontRef>
+        </p:style>
+        <p:txBody>
+          <a:bodyPr rtlCol="0" anchor="ctr"/>
+          <a:lstStyle/>
+          <a:p>
+            <a:pPr algn="ctr"/>
+            <a:endParaRPr lang="zh-CN" altLang="en-US"/>
+          </a:p>
+        </p:txBody>
+      </p:sp>
+      <p:sp>
+        <p:nvSpPr>
+          <p:cNvPr id="9" name="矩形 8">
+            <a:extLst>
+              <a:ext uri="{FF2B5EF4-FFF2-40B4-BE49-F238E27FC236}">
+                <a16:creationId xmlns:a16="http://schemas.microsoft.com/office/drawing/2014/main" id="{A9014885-527C-63CE-94D9-F425BD860CD2}"/>
+              </a:ext>
+            </a:extLst>
+          </p:cNvPr>
+          <p:cNvSpPr/>
+          <p:nvPr/>
+        </p:nvSpPr>
+        <p:spPr>
+          <a:xfrm>
+            <a:off x="9278176" y="4904961"/>
+            <a:ext cx="2166730" cy="1446144"/>
+          </a:xfrm>
+          <a:prstGeom prst="rect">
+            <a:avLst/>
+          </a:prstGeom>
+        </p:spPr>
+        <p:style>
+          <a:lnRef idx="1">
+            <a:schemeClr val="accent4"/>
+          </a:lnRef>
+          <a:fillRef idx="2">
+            <a:schemeClr val="accent4"/>
+          </a:fillRef>
+          <a:effectRef idx="1">
+            <a:schemeClr val="accent4"/>
+          </a:effectRef>
+          <a:fontRef idx="minor">
+            <a:schemeClr val="dk1"/>
+          </a:fontRef>
+        </p:style>
+        <p:txBody>
+          <a:bodyPr rtlCol="0" anchor="ctr"/>
+          <a:lstStyle/>
+          <a:p>
+            <a:pPr algn="ctr"/>
+            <a:endParaRPr lang="zh-CN" altLang="en-US"/>
+          </a:p>
+        </p:txBody>
+      </p:sp>
+      <p:sp>
+        <p:nvSpPr>
+          <p:cNvPr id="10" name="文本框 9">
+            <a:extLst>
+              <a:ext uri="{FF2B5EF4-FFF2-40B4-BE49-F238E27FC236}">
+                <a16:creationId xmlns:a16="http://schemas.microsoft.com/office/drawing/2014/main" id="{11BC3741-A913-0762-7012-A3B0A65F83F3}"/>
+              </a:ext>
+            </a:extLst>
+          </p:cNvPr>
+          <p:cNvSpPr txBox="1"/>
+          <p:nvPr/>
+        </p:nvSpPr>
+        <p:spPr>
+          <a:xfrm>
+            <a:off x="9695622" y="558284"/>
+            <a:ext cx="2107093" cy="369332"/>
+          </a:xfrm>
+          <a:prstGeom prst="rect">
+            <a:avLst/>
+          </a:prstGeom>
+          <a:noFill/>
+        </p:spPr>
+        <p:txBody>
+          <a:bodyPr wrap="square" rtlCol="0">
+            <a:spAutoFit/>
+          </a:bodyPr>
+          <a:lstStyle/>
+          <a:p>
+            <a:r>
+              <a:rPr lang="en-US" altLang="zh-CN" dirty="0"/>
+              <a:t>OUTPUT</a:t>
+            </a:r>
+            <a:endParaRPr lang="zh-CN" altLang="en-US" dirty="0"/>
+          </a:p>
+        </p:txBody>
+      </p:sp>
+      <p:sp>
+        <p:nvSpPr>
+          <p:cNvPr id="11" name="文本框 10">
+            <a:extLst>
+              <a:ext uri="{FF2B5EF4-FFF2-40B4-BE49-F238E27FC236}">
+                <a16:creationId xmlns:a16="http://schemas.microsoft.com/office/drawing/2014/main" id="{67C17DFB-C0FF-F35A-5DF0-66D74223F73C}"/>
+              </a:ext>
+            </a:extLst>
+          </p:cNvPr>
+          <p:cNvSpPr txBox="1"/>
+          <p:nvPr/>
+        </p:nvSpPr>
+        <p:spPr>
+          <a:xfrm>
+            <a:off x="9509259" y="5013503"/>
+            <a:ext cx="1704561" cy="369332"/>
+          </a:xfrm>
+          <a:prstGeom prst="rect">
+            <a:avLst/>
+          </a:prstGeom>
+          <a:noFill/>
+        </p:spPr>
+        <p:txBody>
+          <a:bodyPr wrap="square" rtlCol="0">
+            <a:spAutoFit/>
+          </a:bodyPr>
+          <a:lstStyle/>
+          <a:p>
+            <a:r>
+              <a:rPr lang="en-US" altLang="zh-CN" dirty="0"/>
+              <a:t>EME WORLD</a:t>
+            </a:r>
+            <a:endParaRPr lang="zh-CN" altLang="en-US" dirty="0"/>
+          </a:p>
+        </p:txBody>
+      </p:sp>
+      <p:sp>
+        <p:nvSpPr>
+          <p:cNvPr id="12" name="文本框 11">
+            <a:extLst>
+              <a:ext uri="{FF2B5EF4-FFF2-40B4-BE49-F238E27FC236}">
+                <a16:creationId xmlns:a16="http://schemas.microsoft.com/office/drawing/2014/main" id="{1E932628-2694-BD66-E75B-F1B3E9707A87}"/>
+              </a:ext>
+            </a:extLst>
+          </p:cNvPr>
+          <p:cNvSpPr txBox="1"/>
+          <p:nvPr/>
+        </p:nvSpPr>
+        <p:spPr>
+          <a:xfrm>
+            <a:off x="2087217" y="2256182"/>
+            <a:ext cx="1386509" cy="369332"/>
+          </a:xfrm>
+          <a:prstGeom prst="rect">
+            <a:avLst/>
+          </a:prstGeom>
+          <a:noFill/>
+        </p:spPr>
+        <p:txBody>
+          <a:bodyPr wrap="square" rtlCol="0">
+            <a:spAutoFit/>
+          </a:bodyPr>
+          <a:lstStyle/>
+          <a:p>
+            <a:r>
+              <a:rPr lang="en-US" altLang="zh-CN" dirty="0"/>
+              <a:t>LLM API</a:t>
+            </a:r>
+            <a:endParaRPr lang="zh-CN" altLang="en-US" dirty="0"/>
           </a:p>
         </p:txBody>
       </p:sp>
@@ -3831,4 +4558,319 @@
     </a:ext>
   </a:extLst>
 </a:theme>
+</file>
+
+<file path=ppt/theme/theme2.xml><?xml version="1.0" encoding="utf-8"?>
+<a:theme xmlns:a="http://schemas.openxmlformats.org/drawingml/2006/main" name="Office 主题​​">
+  <a:themeElements>
+    <a:clrScheme name="Office">
+      <a:dk1>
+        <a:sysClr val="windowText" lastClr="000000"/>
+      </a:dk1>
+      <a:lt1>
+        <a:sysClr val="window" lastClr="FFFFFF"/>
+      </a:lt1>
+      <a:dk2>
+        <a:srgbClr val="0E2841"/>
+      </a:dk2>
+      <a:lt2>
+        <a:srgbClr val="E8E8E8"/>
+      </a:lt2>
+      <a:accent1>
+        <a:srgbClr val="156082"/>
+      </a:accent1>
+      <a:accent2>
+        <a:srgbClr val="E97132"/>
+      </a:accent2>
+      <a:accent3>
+        <a:srgbClr val="196B24"/>
+      </a:accent3>
+      <a:accent4>
+        <a:srgbClr val="0F9ED5"/>
+      </a:accent4>
+      <a:accent5>
+        <a:srgbClr val="A02B93"/>
+      </a:accent5>
+      <a:accent6>
+        <a:srgbClr val="4EA72E"/>
+      </a:accent6>
+      <a:hlink>
+        <a:srgbClr val="467886"/>
+      </a:hlink>
+      <a:folHlink>
+        <a:srgbClr val="96607D"/>
+      </a:folHlink>
+    </a:clrScheme>
+    <a:fontScheme name="Office">
+      <a:majorFont>
+        <a:latin typeface="等线 Light" panose="02110004020202020204"/>
+        <a:ea typeface=""/>
+        <a:cs typeface=""/>
+        <a:font script="Jpan" typeface="游ゴシック Light"/>
+        <a:font script="Hang" typeface="맑은 고딕"/>
+        <a:font script="Hans" typeface="等线 Light"/>
+        <a:font script="Hant" typeface="新細明體"/>
+        <a:font script="Arab" typeface="Times New Roman"/>
+        <a:font script="Hebr" typeface="Times New Roman"/>
+        <a:font script="Thai" typeface="Angsana New"/>
+        <a:font script="Ethi" typeface="Nyala"/>
+        <a:font script="Beng" typeface="Vrinda"/>
+        <a:font script="Gujr" typeface="Shruti"/>
+        <a:font script="Khmr" typeface="MoolBoran"/>
+        <a:font script="Knda" typeface="Tunga"/>
+        <a:font script="Guru" typeface="Raavi"/>
+        <a:font script="Cans" typeface="Euphemia"/>
+        <a:font script="Cher" typeface="Plantagenet Cherokee"/>
+        <a:font script="Yiii" typeface="Microsoft Yi Baiti"/>
+        <a:font script="Tibt" typeface="Microsoft Himalaya"/>
+        <a:font script="Thaa" typeface="MV Boli"/>
+        <a:font script="Deva" typeface="Mangal"/>
+        <a:font script="Telu" typeface="Gautami"/>
+        <a:font script="Taml" typeface="Latha"/>
+        <a:font script="Syrc" typeface="Estrangelo Edessa"/>
+        <a:font script="Orya" typeface="Kalinga"/>
+        <a:font script="Mlym" typeface="Kartika"/>
+        <a:font script="Laoo" typeface="DokChampa"/>
+        <a:font script="Sinh" typeface="Iskoola Pota"/>
+        <a:font script="Mong" typeface="Mongolian Baiti"/>
+        <a:font script="Viet" typeface="Times New Roman"/>
+        <a:font script="Uigh" typeface="Microsoft Uighur"/>
+        <a:font script="Geor" typeface="Sylfaen"/>
+        <a:font script="Armn" typeface="Arial"/>
+        <a:font script="Bugi" typeface="Leelawadee UI"/>
+        <a:font script="Bopo" typeface="Microsoft JhengHei"/>
+        <a:font script="Java" typeface="Javanese Text"/>
+        <a:font script="Lisu" typeface="Segoe UI"/>
+        <a:font script="Mymr" typeface="Myanmar Text"/>
+        <a:font script="Nkoo" typeface="Ebrima"/>
+        <a:font script="Olck" typeface="Nirmala UI"/>
+        <a:font script="Osma" typeface="Ebrima"/>
+        <a:font script="Phag" typeface="Phagspa"/>
+        <a:font script="Syrn" typeface="Estrangelo Edessa"/>
+        <a:font script="Syrj" typeface="Estrangelo Edessa"/>
+        <a:font script="Syre" typeface="Estrangelo Edessa"/>
+        <a:font script="Sora" typeface="Nirmala UI"/>
+        <a:font script="Tale" typeface="Microsoft Tai Le"/>
+        <a:font script="Talu" typeface="Microsoft New Tai Lue"/>
+        <a:font script="Tfng" typeface="Ebrima"/>
+      </a:majorFont>
+      <a:minorFont>
+        <a:latin typeface="等线" panose="02110004020202020204"/>
+        <a:ea typeface=""/>
+        <a:cs typeface=""/>
+        <a:font script="Jpan" typeface="游ゴシック"/>
+        <a:font script="Hang" typeface="맑은 고딕"/>
+        <a:font script="Hans" typeface="等线"/>
+        <a:font script="Hant" typeface="新細明體"/>
+        <a:font script="Arab" typeface="Arial"/>
+        <a:font script="Hebr" typeface="Arial"/>
+        <a:font script="Thai" typeface="Cordia New"/>
+        <a:font script="Ethi" typeface="Nyala"/>
+        <a:font script="Beng" typeface="Vrinda"/>
+        <a:font script="Gujr" typeface="Shruti"/>
+        <a:font script="Khmr" typeface="DaunPenh"/>
+        <a:font script="Knda" typeface="Tunga"/>
+        <a:font script="Guru" typeface="Raavi"/>
+        <a:font script="Cans" typeface="Euphemia"/>
+        <a:font script="Cher" typeface="Plantagenet Cherokee"/>
+        <a:font script="Yiii" typeface="Microsoft Yi Baiti"/>
+        <a:font script="Tibt" typeface="Microsoft Himalaya"/>
+        <a:font script="Thaa" typeface="MV Boli"/>
+        <a:font script="Deva" typeface="Mangal"/>
+        <a:font script="Telu" typeface="Gautami"/>
+        <a:font script="Taml" typeface="Latha"/>
+        <a:font script="Syrc" typeface="Estrangelo Edessa"/>
+        <a:font script="Orya" typeface="Kalinga"/>
+        <a:font script="Mlym" typeface="Kartika"/>
+        <a:font script="Laoo" typeface="DokChampa"/>
+        <a:font script="Sinh" typeface="Iskoola Pota"/>
+        <a:font script="Mong" typeface="Mongolian Baiti"/>
+        <a:font script="Viet" typeface="Arial"/>
+        <a:font script="Uigh" typeface="Microsoft Uighur"/>
+        <a:font script="Geor" typeface="Sylfaen"/>
+        <a:font script="Armn" typeface="Arial"/>
+        <a:font script="Bugi" typeface="Leelawadee UI"/>
+        <a:font script="Bopo" typeface="Microsoft JhengHei"/>
+        <a:font script="Java" typeface="Javanese Text"/>
+        <a:font script="Lisu" typeface="Segoe UI"/>
+        <a:font script="Mymr" typeface="Myanmar Text"/>
+        <a:font script="Nkoo" typeface="Ebrima"/>
+        <a:font script="Olck" typeface="Nirmala UI"/>
+        <a:font script="Osma" typeface="Ebrima"/>
+        <a:font script="Phag" typeface="Phagspa"/>
+        <a:font script="Syrn" typeface="Estrangelo Edessa"/>
+        <a:font script="Syrj" typeface="Estrangelo Edessa"/>
+        <a:font script="Syre" typeface="Estrangelo Edessa"/>
+        <a:font script="Sora" typeface="Nirmala UI"/>
+        <a:font script="Tale" typeface="Microsoft Tai Le"/>
+        <a:font script="Talu" typeface="Microsoft New Tai Lue"/>
+        <a:font script="Tfng" typeface="Ebrima"/>
+      </a:minorFont>
+    </a:fontScheme>
+    <a:fmtScheme name="Office">
+      <a:fillStyleLst>
+        <a:solidFill>
+          <a:schemeClr val="phClr"/>
+        </a:solidFill>
+        <a:gradFill rotWithShape="1">
+          <a:gsLst>
+            <a:gs pos="0">
+              <a:schemeClr val="phClr">
+                <a:lumMod val="110000"/>
+                <a:satMod val="105000"/>
+                <a:tint val="67000"/>
+              </a:schemeClr>
+            </a:gs>
+            <a:gs pos="50000">
+              <a:schemeClr val="phClr">
+                <a:lumMod val="105000"/>
+                <a:satMod val="103000"/>
+                <a:tint val="73000"/>
+              </a:schemeClr>
+            </a:gs>
+            <a:gs pos="100000">
+              <a:schemeClr val="phClr">
+                <a:lumMod val="105000"/>
+                <a:satMod val="109000"/>
+                <a:tint val="81000"/>
+              </a:schemeClr>
+            </a:gs>
+          </a:gsLst>
+          <a:lin ang="5400000" scaled="0"/>
+        </a:gradFill>
+        <a:gradFill rotWithShape="1">
+          <a:gsLst>
+            <a:gs pos="0">
+              <a:schemeClr val="phClr">
+                <a:satMod val="103000"/>
+                <a:lumMod val="102000"/>
+                <a:tint val="94000"/>
+              </a:schemeClr>
+            </a:gs>
+            <a:gs pos="50000">
+              <a:schemeClr val="phClr">
+                <a:satMod val="110000"/>
+                <a:lumMod val="100000"/>
+                <a:shade val="100000"/>
+              </a:schemeClr>
+            </a:gs>
+            <a:gs pos="100000">
+              <a:schemeClr val="phClr">
+                <a:lumMod val="99000"/>
+                <a:satMod val="120000"/>
+                <a:shade val="78000"/>
+              </a:schemeClr>
+            </a:gs>
+          </a:gsLst>
+          <a:lin ang="5400000" scaled="0"/>
+        </a:gradFill>
+      </a:fillStyleLst>
+      <a:lnStyleLst>
+        <a:ln w="12700" cap="flat" cmpd="sng" algn="ctr">
+          <a:solidFill>
+            <a:schemeClr val="phClr"/>
+          </a:solidFill>
+          <a:prstDash val="solid"/>
+          <a:miter lim="800000"/>
+        </a:ln>
+        <a:ln w="19050" cap="flat" cmpd="sng" algn="ctr">
+          <a:solidFill>
+            <a:schemeClr val="phClr"/>
+          </a:solidFill>
+          <a:prstDash val="solid"/>
+          <a:miter lim="800000"/>
+        </a:ln>
+        <a:ln w="25400" cap="flat" cmpd="sng" algn="ctr">
+          <a:solidFill>
+            <a:schemeClr val="phClr"/>
+          </a:solidFill>
+          <a:prstDash val="solid"/>
+          <a:miter lim="800000"/>
+        </a:ln>
+      </a:lnStyleLst>
+      <a:effectStyleLst>
+        <a:effectStyle>
+          <a:effectLst/>
+        </a:effectStyle>
+        <a:effectStyle>
+          <a:effectLst/>
+        </a:effectStyle>
+        <a:effectStyle>
+          <a:effectLst>
+            <a:outerShdw blurRad="57150" dist="19050" dir="5400000" algn="ctr" rotWithShape="0">
+              <a:srgbClr val="000000">
+                <a:alpha val="63000"/>
+              </a:srgbClr>
+            </a:outerShdw>
+          </a:effectLst>
+        </a:effectStyle>
+      </a:effectStyleLst>
+      <a:bgFillStyleLst>
+        <a:solidFill>
+          <a:schemeClr val="phClr"/>
+        </a:solidFill>
+        <a:solidFill>
+          <a:schemeClr val="phClr">
+            <a:tint val="95000"/>
+            <a:satMod val="170000"/>
+          </a:schemeClr>
+        </a:solidFill>
+        <a:gradFill rotWithShape="1">
+          <a:gsLst>
+            <a:gs pos="0">
+              <a:schemeClr val="phClr">
+                <a:tint val="93000"/>
+                <a:satMod val="150000"/>
+                <a:shade val="98000"/>
+                <a:lumMod val="102000"/>
+              </a:schemeClr>
+            </a:gs>
+            <a:gs pos="50000">
+              <a:schemeClr val="phClr">
+                <a:tint val="98000"/>
+                <a:satMod val="130000"/>
+                <a:shade val="90000"/>
+                <a:lumMod val="103000"/>
+              </a:schemeClr>
+            </a:gs>
+            <a:gs pos="100000">
+              <a:schemeClr val="phClr">
+                <a:shade val="63000"/>
+                <a:satMod val="120000"/>
+              </a:schemeClr>
+            </a:gs>
+          </a:gsLst>
+          <a:lin ang="5400000" scaled="0"/>
+        </a:gradFill>
+      </a:bgFillStyleLst>
+    </a:fmtScheme>
+  </a:themeElements>
+  <a:objectDefaults>
+    <a:lnDef>
+      <a:spPr/>
+      <a:bodyPr/>
+      <a:lstStyle/>
+      <a:style>
+        <a:lnRef idx="2">
+          <a:schemeClr val="accent1"/>
+        </a:lnRef>
+        <a:fillRef idx="0">
+          <a:schemeClr val="accent1"/>
+        </a:fillRef>
+        <a:effectRef idx="1">
+          <a:schemeClr val="accent1"/>
+        </a:effectRef>
+        <a:fontRef idx="minor">
+          <a:schemeClr val="tx1"/>
+        </a:fontRef>
+      </a:style>
+    </a:lnDef>
+  </a:objectDefaults>
+  <a:extraClrSchemeLst/>
+  <a:extLst>
+    <a:ext uri="{05A4C25C-085E-4340-85A3-A5531E510DB2}">
+      <thm15:themeFamily xmlns:thm15="http://schemas.microsoft.com/office/thememl/2012/main" name="Office Theme" id="{2E142A2C-CD16-42D6-873A-C26D2A0506FA}" vid="{1BDDFF52-6CD6-40A5-AB3C-68EB2F1E4D0A}"/>
+    </a:ext>
+  </a:extLst>
+</a:theme>
 </file>
--- a/docs/overview.pptx
+++ b/docs/overview.pptx
@@ -4229,6 +4229,242 @@
               <a:t>LLM API</a:t>
             </a:r>
             <a:endParaRPr lang="zh-CN" altLang="en-US" dirty="0"/>
+          </a:p>
+        </p:txBody>
+      </p:sp>
+      <p:sp>
+        <p:nvSpPr>
+          <p:cNvPr id="13" name="文本框 12">
+            <a:extLst>
+              <a:ext uri="{FF2B5EF4-FFF2-40B4-BE49-F238E27FC236}">
+                <a16:creationId xmlns:a16="http://schemas.microsoft.com/office/drawing/2014/main" id="{FB4FEC95-B6E1-D130-EA6A-8CD95B0ADEA5}"/>
+              </a:ext>
+            </a:extLst>
+          </p:cNvPr>
+          <p:cNvSpPr txBox="1"/>
+          <p:nvPr/>
+        </p:nvSpPr>
+        <p:spPr>
+          <a:xfrm>
+            <a:off x="1993900" y="3124200"/>
+            <a:ext cx="1085850" cy="369332"/>
+          </a:xfrm>
+          <a:prstGeom prst="rect">
+            <a:avLst/>
+          </a:prstGeom>
+          <a:noFill/>
+        </p:spPr>
+        <p:txBody>
+          <a:bodyPr wrap="square" rtlCol="0">
+            <a:spAutoFit/>
+          </a:bodyPr>
+          <a:lstStyle/>
+          <a:p>
+            <a:r>
+              <a:rPr lang="en-US" altLang="zh-CN" dirty="0"/>
+              <a:t>3DGS</a:t>
+            </a:r>
+            <a:endParaRPr lang="zh-CN" altLang="en-US" dirty="0"/>
+          </a:p>
+        </p:txBody>
+      </p:sp>
+      <p:sp>
+        <p:nvSpPr>
+          <p:cNvPr id="14" name="文本框 13">
+            <a:extLst>
+              <a:ext uri="{FF2B5EF4-FFF2-40B4-BE49-F238E27FC236}">
+                <a16:creationId xmlns:a16="http://schemas.microsoft.com/office/drawing/2014/main" id="{27F2FB6D-5423-ABA2-ABC5-C18DB98A8523}"/>
+              </a:ext>
+            </a:extLst>
+          </p:cNvPr>
+          <p:cNvSpPr txBox="1"/>
+          <p:nvPr/>
+        </p:nvSpPr>
+        <p:spPr>
+          <a:xfrm>
+            <a:off x="9559290" y="5474970"/>
+            <a:ext cx="1615440" cy="461665"/>
+          </a:xfrm>
+          <a:prstGeom prst="rect">
+            <a:avLst/>
+          </a:prstGeom>
+          <a:noFill/>
+        </p:spPr>
+        <p:txBody>
+          <a:bodyPr wrap="square" rtlCol="0">
+            <a:spAutoFit/>
+          </a:bodyPr>
+          <a:lstStyle/>
+          <a:p>
+            <a:r>
+              <a:rPr lang="en-US" altLang="zh-CN" sz="1200" dirty="0"/>
+              <a:t>We don't need to consider this for now.</a:t>
+            </a:r>
+            <a:endParaRPr lang="zh-CN" altLang="en-US" sz="1200" dirty="0"/>
+          </a:p>
+        </p:txBody>
+      </p:sp>
+      <p:sp>
+        <p:nvSpPr>
+          <p:cNvPr id="15" name="文本框 14">
+            <a:extLst>
+              <a:ext uri="{FF2B5EF4-FFF2-40B4-BE49-F238E27FC236}">
+                <a16:creationId xmlns:a16="http://schemas.microsoft.com/office/drawing/2014/main" id="{BBD2CF9C-6E52-A147-8215-55B8D7F3892E}"/>
+              </a:ext>
+            </a:extLst>
+          </p:cNvPr>
+          <p:cNvSpPr txBox="1"/>
+          <p:nvPr/>
+        </p:nvSpPr>
+        <p:spPr>
+          <a:xfrm>
+            <a:off x="1870074" y="1263650"/>
+            <a:ext cx="1463675" cy="369332"/>
+          </a:xfrm>
+          <a:prstGeom prst="rect">
+            <a:avLst/>
+          </a:prstGeom>
+          <a:noFill/>
+        </p:spPr>
+        <p:txBody>
+          <a:bodyPr wrap="square" rtlCol="0">
+            <a:spAutoFit/>
+          </a:bodyPr>
+          <a:lstStyle/>
+          <a:p>
+            <a:r>
+              <a:rPr lang="en-US" altLang="zh-CN" dirty="0" err="1"/>
+              <a:t>Photo,video</a:t>
+            </a:r>
+            <a:endParaRPr lang="zh-CN" altLang="en-US" dirty="0"/>
+          </a:p>
+        </p:txBody>
+      </p:sp>
+      <p:sp>
+        <p:nvSpPr>
+          <p:cNvPr id="16" name="矩形 15">
+            <a:extLst>
+              <a:ext uri="{FF2B5EF4-FFF2-40B4-BE49-F238E27FC236}">
+                <a16:creationId xmlns:a16="http://schemas.microsoft.com/office/drawing/2014/main" id="{D3C047A2-B398-185B-A46F-9A774994271B}"/>
+              </a:ext>
+            </a:extLst>
+          </p:cNvPr>
+          <p:cNvSpPr/>
+          <p:nvPr/>
+        </p:nvSpPr>
+        <p:spPr>
+          <a:xfrm>
+            <a:off x="4089400" y="1212850"/>
+            <a:ext cx="1339850" cy="704850"/>
+          </a:xfrm>
+          <a:prstGeom prst="rect">
+            <a:avLst/>
+          </a:prstGeom>
+        </p:spPr>
+        <p:style>
+          <a:lnRef idx="2">
+            <a:schemeClr val="accent1">
+              <a:shade val="15000"/>
+            </a:schemeClr>
+          </a:lnRef>
+          <a:fillRef idx="1">
+            <a:schemeClr val="accent1"/>
+          </a:fillRef>
+          <a:effectRef idx="0">
+            <a:schemeClr val="accent1"/>
+          </a:effectRef>
+          <a:fontRef idx="minor">
+            <a:schemeClr val="lt1"/>
+          </a:fontRef>
+        </p:style>
+        <p:txBody>
+          <a:bodyPr rtlCol="0" anchor="ctr"/>
+          <a:lstStyle/>
+          <a:p>
+            <a:pPr algn="ctr"/>
+            <a:endParaRPr lang="zh-CN" altLang="en-US"/>
+          </a:p>
+        </p:txBody>
+      </p:sp>
+      <p:sp>
+        <p:nvSpPr>
+          <p:cNvPr id="17" name="文本框 16">
+            <a:extLst>
+              <a:ext uri="{FF2B5EF4-FFF2-40B4-BE49-F238E27FC236}">
+                <a16:creationId xmlns:a16="http://schemas.microsoft.com/office/drawing/2014/main" id="{35940A9D-0E41-7561-4CC1-21F5DEAC1D2A}"/>
+              </a:ext>
+            </a:extLst>
+          </p:cNvPr>
+          <p:cNvSpPr txBox="1"/>
+          <p:nvPr/>
+        </p:nvSpPr>
+        <p:spPr>
+          <a:xfrm>
+            <a:off x="4264025" y="1355725"/>
+            <a:ext cx="1165225" cy="369332"/>
+          </a:xfrm>
+          <a:prstGeom prst="rect">
+            <a:avLst/>
+          </a:prstGeom>
+          <a:noFill/>
+        </p:spPr>
+        <p:txBody>
+          <a:bodyPr wrap="square" rtlCol="0">
+            <a:spAutoFit/>
+          </a:bodyPr>
+          <a:lstStyle/>
+          <a:p>
+            <a:r>
+              <a:rPr lang="en-US" altLang="zh-CN" dirty="0"/>
+              <a:t>Tahoe</a:t>
+            </a:r>
+            <a:endParaRPr lang="zh-CN" altLang="en-US" dirty="0"/>
+          </a:p>
+        </p:txBody>
+      </p:sp>
+      <p:sp>
+        <p:nvSpPr>
+          <p:cNvPr id="20" name="箭头: 右 19">
+            <a:extLst>
+              <a:ext uri="{FF2B5EF4-FFF2-40B4-BE49-F238E27FC236}">
+                <a16:creationId xmlns:a16="http://schemas.microsoft.com/office/drawing/2014/main" id="{243B9B5A-9DF2-5739-FB44-60C57D9F2FFD}"/>
+              </a:ext>
+            </a:extLst>
+          </p:cNvPr>
+          <p:cNvSpPr/>
+          <p:nvPr/>
+        </p:nvSpPr>
+        <p:spPr>
+          <a:xfrm>
+            <a:off x="3419475" y="1355725"/>
+            <a:ext cx="628650" cy="369332"/>
+          </a:xfrm>
+          <a:prstGeom prst="rightArrow">
+            <a:avLst/>
+          </a:prstGeom>
+        </p:spPr>
+        <p:style>
+          <a:lnRef idx="2">
+            <a:schemeClr val="accent1">
+              <a:shade val="15000"/>
+            </a:schemeClr>
+          </a:lnRef>
+          <a:fillRef idx="1">
+            <a:schemeClr val="accent1"/>
+          </a:fillRef>
+          <a:effectRef idx="0">
+            <a:schemeClr val="accent1"/>
+          </a:effectRef>
+          <a:fontRef idx="minor">
+            <a:schemeClr val="lt1"/>
+          </a:fontRef>
+        </p:style>
+        <p:txBody>
+          <a:bodyPr rtlCol="0" anchor="ctr"/>
+          <a:lstStyle/>
+          <a:p>
+            <a:pPr algn="ctr"/>
+            <a:endParaRPr lang="zh-CN" altLang="en-US"/>
           </a:p>
         </p:txBody>
       </p:sp>

--- a/docs/overview.pptx
+++ b/docs/overview.pptx
@@ -4048,7 +4048,7 @@
         </p:nvSpPr>
         <p:spPr>
           <a:xfrm>
-            <a:off x="9235934" y="979005"/>
+            <a:off x="9230689" y="971351"/>
             <a:ext cx="2251213" cy="3841475"/>
           </a:xfrm>
           <a:prstGeom prst="rect">
@@ -4465,6 +4465,452 @@
           <a:p>
             <a:pPr algn="ctr"/>
             <a:endParaRPr lang="zh-CN" altLang="en-US"/>
+          </a:p>
+        </p:txBody>
+      </p:sp>
+      <p:sp>
+        <p:nvSpPr>
+          <p:cNvPr id="21" name="椭圆 20">
+            <a:extLst>
+              <a:ext uri="{FF2B5EF4-FFF2-40B4-BE49-F238E27FC236}">
+                <a16:creationId xmlns:a16="http://schemas.microsoft.com/office/drawing/2014/main" id="{BC2F963A-4350-5A96-3512-FB11643490A2}"/>
+              </a:ext>
+            </a:extLst>
+          </p:cNvPr>
+          <p:cNvSpPr/>
+          <p:nvPr/>
+        </p:nvSpPr>
+        <p:spPr>
+          <a:xfrm>
+            <a:off x="5176836" y="1263650"/>
+            <a:ext cx="165100" cy="177800"/>
+          </a:xfrm>
+          <a:prstGeom prst="ellipse">
+            <a:avLst/>
+          </a:prstGeom>
+        </p:spPr>
+        <p:style>
+          <a:lnRef idx="2">
+            <a:schemeClr val="accent2">
+              <a:shade val="15000"/>
+            </a:schemeClr>
+          </a:lnRef>
+          <a:fillRef idx="1">
+            <a:schemeClr val="accent2"/>
+          </a:fillRef>
+          <a:effectRef idx="0">
+            <a:schemeClr val="accent2"/>
+          </a:effectRef>
+          <a:fontRef idx="minor">
+            <a:schemeClr val="lt1"/>
+          </a:fontRef>
+        </p:style>
+        <p:txBody>
+          <a:bodyPr rtlCol="0" anchor="ctr"/>
+          <a:lstStyle/>
+          <a:p>
+            <a:pPr algn="ctr"/>
+            <a:endParaRPr lang="zh-CN" altLang="en-US"/>
+          </a:p>
+        </p:txBody>
+      </p:sp>
+      <p:sp>
+        <p:nvSpPr>
+          <p:cNvPr id="22" name="文本框 21">
+            <a:extLst>
+              <a:ext uri="{FF2B5EF4-FFF2-40B4-BE49-F238E27FC236}">
+                <a16:creationId xmlns:a16="http://schemas.microsoft.com/office/drawing/2014/main" id="{1D984F89-675C-46D8-A980-F7F632A9E723}"/>
+              </a:ext>
+            </a:extLst>
+          </p:cNvPr>
+          <p:cNvSpPr txBox="1"/>
+          <p:nvPr/>
+        </p:nvSpPr>
+        <p:spPr>
+          <a:xfrm>
+            <a:off x="5137945" y="1225592"/>
+            <a:ext cx="165099" cy="253916"/>
+          </a:xfrm>
+          <a:prstGeom prst="rect">
+            <a:avLst/>
+          </a:prstGeom>
+          <a:noFill/>
+        </p:spPr>
+        <p:txBody>
+          <a:bodyPr wrap="square" rtlCol="0">
+            <a:spAutoFit/>
+          </a:bodyPr>
+          <a:lstStyle/>
+          <a:p>
+            <a:r>
+              <a:rPr lang="en-US" altLang="zh-CN" sz="1050" dirty="0"/>
+              <a:t>1</a:t>
+            </a:r>
+            <a:endParaRPr lang="zh-CN" altLang="en-US" sz="1050" dirty="0"/>
+          </a:p>
+        </p:txBody>
+      </p:sp>
+      <p:sp>
+        <p:nvSpPr>
+          <p:cNvPr id="23" name="文本框 22">
+            <a:extLst>
+              <a:ext uri="{FF2B5EF4-FFF2-40B4-BE49-F238E27FC236}">
+                <a16:creationId xmlns:a16="http://schemas.microsoft.com/office/drawing/2014/main" id="{F846304B-1544-FD7D-D444-8CB4AF7611D8}"/>
+              </a:ext>
+            </a:extLst>
+          </p:cNvPr>
+          <p:cNvSpPr txBox="1"/>
+          <p:nvPr/>
+        </p:nvSpPr>
+        <p:spPr>
+          <a:xfrm>
+            <a:off x="94422" y="4388126"/>
+            <a:ext cx="2276061" cy="369332"/>
+          </a:xfrm>
+          <a:prstGeom prst="rect">
+            <a:avLst/>
+          </a:prstGeom>
+          <a:noFill/>
+        </p:spPr>
+        <p:txBody>
+          <a:bodyPr wrap="square" rtlCol="0">
+            <a:spAutoFit/>
+          </a:bodyPr>
+          <a:lstStyle/>
+          <a:p>
+            <a:r>
+              <a:rPr lang="en-US" altLang="zh-CN" dirty="0"/>
+              <a:t>1.</a:t>
+            </a:r>
+            <a:endParaRPr lang="zh-CN" altLang="en-US" dirty="0"/>
+          </a:p>
+        </p:txBody>
+      </p:sp>
+      <p:sp>
+        <p:nvSpPr>
+          <p:cNvPr id="24" name="矩形 23">
+            <a:extLst>
+              <a:ext uri="{FF2B5EF4-FFF2-40B4-BE49-F238E27FC236}">
+                <a16:creationId xmlns:a16="http://schemas.microsoft.com/office/drawing/2014/main" id="{BA8D103F-E6D2-0C69-1F32-C58447F00C71}"/>
+              </a:ext>
+            </a:extLst>
+          </p:cNvPr>
+          <p:cNvSpPr/>
+          <p:nvPr/>
+        </p:nvSpPr>
+        <p:spPr>
+          <a:xfrm>
+            <a:off x="9355381" y="3881230"/>
+            <a:ext cx="2012315" cy="827930"/>
+          </a:xfrm>
+          <a:prstGeom prst="rect">
+            <a:avLst/>
+          </a:prstGeom>
+        </p:spPr>
+        <p:style>
+          <a:lnRef idx="2">
+            <a:schemeClr val="accent4">
+              <a:shade val="15000"/>
+            </a:schemeClr>
+          </a:lnRef>
+          <a:fillRef idx="1">
+            <a:schemeClr val="accent4"/>
+          </a:fillRef>
+          <a:effectRef idx="0">
+            <a:schemeClr val="accent4"/>
+          </a:effectRef>
+          <a:fontRef idx="minor">
+            <a:schemeClr val="lt1"/>
+          </a:fontRef>
+        </p:style>
+        <p:txBody>
+          <a:bodyPr rtlCol="0" anchor="ctr"/>
+          <a:lstStyle/>
+          <a:p>
+            <a:pPr algn="ctr"/>
+            <a:endParaRPr lang="zh-CN" altLang="en-US"/>
+          </a:p>
+        </p:txBody>
+      </p:sp>
+      <p:sp>
+        <p:nvSpPr>
+          <p:cNvPr id="25" name="文本框 24">
+            <a:extLst>
+              <a:ext uri="{FF2B5EF4-FFF2-40B4-BE49-F238E27FC236}">
+                <a16:creationId xmlns:a16="http://schemas.microsoft.com/office/drawing/2014/main" id="{C3FC6DA9-36F2-0E5E-B307-2E7EC4D673C1}"/>
+              </a:ext>
+            </a:extLst>
+          </p:cNvPr>
+          <p:cNvSpPr txBox="1"/>
+          <p:nvPr/>
+        </p:nvSpPr>
+        <p:spPr>
+          <a:xfrm>
+            <a:off x="9833605" y="4086765"/>
+            <a:ext cx="1824990" cy="369332"/>
+          </a:xfrm>
+          <a:prstGeom prst="rect">
+            <a:avLst/>
+          </a:prstGeom>
+          <a:noFill/>
+        </p:spPr>
+        <p:txBody>
+          <a:bodyPr wrap="square" rtlCol="0">
+            <a:spAutoFit/>
+          </a:bodyPr>
+          <a:lstStyle/>
+          <a:p>
+            <a:r>
+              <a:rPr lang="en-US" altLang="zh-CN" dirty="0"/>
+              <a:t>Genesis</a:t>
+            </a:r>
+            <a:endParaRPr lang="zh-CN" altLang="en-US" dirty="0"/>
+          </a:p>
+        </p:txBody>
+      </p:sp>
+      <p:sp>
+        <p:nvSpPr>
+          <p:cNvPr id="26" name="箭头: 下 25">
+            <a:extLst>
+              <a:ext uri="{FF2B5EF4-FFF2-40B4-BE49-F238E27FC236}">
+                <a16:creationId xmlns:a16="http://schemas.microsoft.com/office/drawing/2014/main" id="{700ED5AB-62A5-D122-4C9A-C7D989BAA292}"/>
+              </a:ext>
+            </a:extLst>
+          </p:cNvPr>
+          <p:cNvSpPr/>
+          <p:nvPr/>
+        </p:nvSpPr>
+        <p:spPr>
+          <a:xfrm>
+            <a:off x="9559290" y="3429000"/>
+            <a:ext cx="444443" cy="360095"/>
+          </a:xfrm>
+          <a:prstGeom prst="downArrow">
+            <a:avLst/>
+          </a:prstGeom>
+        </p:spPr>
+        <p:style>
+          <a:lnRef idx="2">
+            <a:schemeClr val="accent1">
+              <a:shade val="15000"/>
+            </a:schemeClr>
+          </a:lnRef>
+          <a:fillRef idx="1">
+            <a:schemeClr val="accent1"/>
+          </a:fillRef>
+          <a:effectRef idx="0">
+            <a:schemeClr val="accent1"/>
+          </a:effectRef>
+          <a:fontRef idx="minor">
+            <a:schemeClr val="lt1"/>
+          </a:fontRef>
+        </p:style>
+        <p:txBody>
+          <a:bodyPr rtlCol="0" anchor="ctr"/>
+          <a:lstStyle/>
+          <a:p>
+            <a:pPr algn="ctr"/>
+            <a:endParaRPr lang="zh-CN" altLang="en-US"/>
+          </a:p>
+        </p:txBody>
+      </p:sp>
+      <p:sp>
+        <p:nvSpPr>
+          <p:cNvPr id="27" name="文本框 26">
+            <a:extLst>
+              <a:ext uri="{FF2B5EF4-FFF2-40B4-BE49-F238E27FC236}">
+                <a16:creationId xmlns:a16="http://schemas.microsoft.com/office/drawing/2014/main" id="{EED7DF7D-79DE-FE7D-5649-FF5EB5BC2C22}"/>
+              </a:ext>
+            </a:extLst>
+          </p:cNvPr>
+          <p:cNvSpPr txBox="1"/>
+          <p:nvPr/>
+        </p:nvSpPr>
+        <p:spPr>
+          <a:xfrm>
+            <a:off x="10042525" y="3429000"/>
+            <a:ext cx="1235075" cy="369332"/>
+          </a:xfrm>
+          <a:prstGeom prst="rect">
+            <a:avLst/>
+          </a:prstGeom>
+          <a:noFill/>
+        </p:spPr>
+        <p:txBody>
+          <a:bodyPr wrap="square" rtlCol="0">
+            <a:spAutoFit/>
+          </a:bodyPr>
+          <a:lstStyle/>
+          <a:p>
+            <a:r>
+              <a:rPr lang="en-US" altLang="zh-CN" dirty="0"/>
+              <a:t>Based on</a:t>
+            </a:r>
+            <a:endParaRPr lang="zh-CN" altLang="en-US" dirty="0"/>
+          </a:p>
+        </p:txBody>
+      </p:sp>
+      <p:sp>
+        <p:nvSpPr>
+          <p:cNvPr id="28" name="矩形 27">
+            <a:extLst>
+              <a:ext uri="{FF2B5EF4-FFF2-40B4-BE49-F238E27FC236}">
+                <a16:creationId xmlns:a16="http://schemas.microsoft.com/office/drawing/2014/main" id="{D880FCCE-7103-9A73-DF05-607D4895CFFA}"/>
+              </a:ext>
+            </a:extLst>
+          </p:cNvPr>
+          <p:cNvSpPr/>
+          <p:nvPr/>
+        </p:nvSpPr>
+        <p:spPr>
+          <a:xfrm>
+            <a:off x="9302750" y="2498725"/>
+            <a:ext cx="2107093" cy="781050"/>
+          </a:xfrm>
+          <a:prstGeom prst="rect">
+            <a:avLst/>
+          </a:prstGeom>
+        </p:spPr>
+        <p:style>
+          <a:lnRef idx="2">
+            <a:schemeClr val="accent4">
+              <a:shade val="15000"/>
+            </a:schemeClr>
+          </a:lnRef>
+          <a:fillRef idx="1">
+            <a:schemeClr val="accent4"/>
+          </a:fillRef>
+          <a:effectRef idx="0">
+            <a:schemeClr val="accent4"/>
+          </a:effectRef>
+          <a:fontRef idx="minor">
+            <a:schemeClr val="lt1"/>
+          </a:fontRef>
+        </p:style>
+        <p:txBody>
+          <a:bodyPr rtlCol="0" anchor="ctr"/>
+          <a:lstStyle/>
+          <a:p>
+            <a:pPr algn="ctr"/>
+            <a:endParaRPr lang="zh-CN" altLang="en-US"/>
+          </a:p>
+        </p:txBody>
+      </p:sp>
+      <p:sp>
+        <p:nvSpPr>
+          <p:cNvPr id="29" name="文本框 28">
+            <a:extLst>
+              <a:ext uri="{FF2B5EF4-FFF2-40B4-BE49-F238E27FC236}">
+                <a16:creationId xmlns:a16="http://schemas.microsoft.com/office/drawing/2014/main" id="{4EF0427C-E840-5409-49CD-F2C8B5FCE8F9}"/>
+              </a:ext>
+            </a:extLst>
+          </p:cNvPr>
+          <p:cNvSpPr txBox="1"/>
+          <p:nvPr/>
+        </p:nvSpPr>
+        <p:spPr>
+          <a:xfrm>
+            <a:off x="9404350" y="2673350"/>
+            <a:ext cx="1809470" cy="369332"/>
+          </a:xfrm>
+          <a:prstGeom prst="rect">
+            <a:avLst/>
+          </a:prstGeom>
+          <a:noFill/>
+        </p:spPr>
+        <p:txBody>
+          <a:bodyPr wrap="square" rtlCol="0">
+            <a:spAutoFit/>
+          </a:bodyPr>
+          <a:lstStyle/>
+          <a:p>
+            <a:r>
+              <a:rPr lang="en-US" altLang="zh-CN" dirty="0"/>
+              <a:t>AMAR GENIS</a:t>
+            </a:r>
+            <a:endParaRPr lang="zh-CN" altLang="en-US" dirty="0"/>
+          </a:p>
+        </p:txBody>
+      </p:sp>
+      <p:sp>
+        <p:nvSpPr>
+          <p:cNvPr id="30" name="箭头: 下 29">
+            <a:extLst>
+              <a:ext uri="{FF2B5EF4-FFF2-40B4-BE49-F238E27FC236}">
+                <a16:creationId xmlns:a16="http://schemas.microsoft.com/office/drawing/2014/main" id="{C31BD1BD-369A-84A0-021F-9407484AB32E}"/>
+              </a:ext>
+            </a:extLst>
+          </p:cNvPr>
+          <p:cNvSpPr/>
+          <p:nvPr/>
+        </p:nvSpPr>
+        <p:spPr>
+          <a:xfrm>
+            <a:off x="9559290" y="2080591"/>
+            <a:ext cx="330835" cy="333653"/>
+          </a:xfrm>
+          <a:prstGeom prst="downArrow">
+            <a:avLst/>
+          </a:prstGeom>
+        </p:spPr>
+        <p:style>
+          <a:lnRef idx="2">
+            <a:schemeClr val="accent1">
+              <a:shade val="15000"/>
+            </a:schemeClr>
+          </a:lnRef>
+          <a:fillRef idx="1">
+            <a:schemeClr val="accent1"/>
+          </a:fillRef>
+          <a:effectRef idx="0">
+            <a:schemeClr val="accent1"/>
+          </a:effectRef>
+          <a:fontRef idx="minor">
+            <a:schemeClr val="lt1"/>
+          </a:fontRef>
+        </p:style>
+        <p:txBody>
+          <a:bodyPr rtlCol="0" anchor="ctr"/>
+          <a:lstStyle/>
+          <a:p>
+            <a:pPr algn="ctr"/>
+            <a:endParaRPr lang="zh-CN" altLang="en-US"/>
+          </a:p>
+        </p:txBody>
+      </p:sp>
+      <p:sp>
+        <p:nvSpPr>
+          <p:cNvPr id="31" name="文本框 30">
+            <a:extLst>
+              <a:ext uri="{FF2B5EF4-FFF2-40B4-BE49-F238E27FC236}">
+                <a16:creationId xmlns:a16="http://schemas.microsoft.com/office/drawing/2014/main" id="{C51AB83E-90C0-6DF1-EA2C-97C28F7E3EED}"/>
+              </a:ext>
+            </a:extLst>
+          </p:cNvPr>
+          <p:cNvSpPr txBox="1"/>
+          <p:nvPr/>
+        </p:nvSpPr>
+        <p:spPr>
+          <a:xfrm>
+            <a:off x="9974332" y="2013332"/>
+            <a:ext cx="1371459" cy="369332"/>
+          </a:xfrm>
+          <a:prstGeom prst="rect">
+            <a:avLst/>
+          </a:prstGeom>
+          <a:noFill/>
+        </p:spPr>
+        <p:txBody>
+          <a:bodyPr wrap="square" rtlCol="0">
+            <a:spAutoFit/>
+          </a:bodyPr>
+          <a:lstStyle/>
+          <a:p>
+            <a:r>
+              <a:rPr lang="en-US" altLang="zh-CN" dirty="0"/>
+              <a:t>Based on</a:t>
+            </a:r>
+            <a:endParaRPr lang="zh-CN" altLang="en-US" dirty="0"/>
           </a:p>
         </p:txBody>
       </p:sp>

--- a/docs/overview.pptx
+++ b/docs/overview.pptx
@@ -4552,42 +4552,6 @@
       </p:sp>
       <p:sp>
         <p:nvSpPr>
-          <p:cNvPr id="23" name="文本框 22">
-            <a:extLst>
-              <a:ext uri="{FF2B5EF4-FFF2-40B4-BE49-F238E27FC236}">
-                <a16:creationId xmlns:a16="http://schemas.microsoft.com/office/drawing/2014/main" id="{F846304B-1544-FD7D-D444-8CB4AF7611D8}"/>
-              </a:ext>
-            </a:extLst>
-          </p:cNvPr>
-          <p:cNvSpPr txBox="1"/>
-          <p:nvPr/>
-        </p:nvSpPr>
-        <p:spPr>
-          <a:xfrm>
-            <a:off x="94422" y="4388126"/>
-            <a:ext cx="2276061" cy="369332"/>
-          </a:xfrm>
-          <a:prstGeom prst="rect">
-            <a:avLst/>
-          </a:prstGeom>
-          <a:noFill/>
-        </p:spPr>
-        <p:txBody>
-          <a:bodyPr wrap="square" rtlCol="0">
-            <a:spAutoFit/>
-          </a:bodyPr>
-          <a:lstStyle/>
-          <a:p>
-            <a:r>
-              <a:rPr lang="en-US" altLang="zh-CN" dirty="0"/>
-              <a:t>1.</a:t>
-            </a:r>
-            <a:endParaRPr lang="zh-CN" altLang="en-US" dirty="0"/>
-          </a:p>
-        </p:txBody>
-      </p:sp>
-      <p:sp>
-        <p:nvSpPr>
           <p:cNvPr id="24" name="矩形 23">
             <a:extLst>
               <a:ext uri="{FF2B5EF4-FFF2-40B4-BE49-F238E27FC236}">
@@ -4909,6 +4873,366 @@
             <a:r>
               <a:rPr lang="en-US" altLang="zh-CN" dirty="0"/>
               <a:t>Based on</a:t>
+            </a:r>
+            <a:endParaRPr lang="zh-CN" altLang="en-US" dirty="0"/>
+          </a:p>
+        </p:txBody>
+      </p:sp>
+      <p:sp>
+        <p:nvSpPr>
+          <p:cNvPr id="32" name="文本框 31">
+            <a:extLst>
+              <a:ext uri="{FF2B5EF4-FFF2-40B4-BE49-F238E27FC236}">
+                <a16:creationId xmlns:a16="http://schemas.microsoft.com/office/drawing/2014/main" id="{985A8567-5450-9BDE-A4B3-74EC53705452}"/>
+              </a:ext>
+            </a:extLst>
+          </p:cNvPr>
+          <p:cNvSpPr txBox="1"/>
+          <p:nvPr/>
+        </p:nvSpPr>
+        <p:spPr>
+          <a:xfrm>
+            <a:off x="81998" y="4489660"/>
+            <a:ext cx="2758108" cy="646331"/>
+          </a:xfrm>
+          <a:prstGeom prst="rect">
+            <a:avLst/>
+          </a:prstGeom>
+          <a:noFill/>
+        </p:spPr>
+        <p:txBody>
+          <a:bodyPr wrap="square" rtlCol="0">
+            <a:spAutoFit/>
+          </a:bodyPr>
+          <a:lstStyle/>
+          <a:p>
+            <a:r>
+              <a:rPr lang="en-US" altLang="zh-CN" dirty="0"/>
+              <a:t>1.This is a world model based on </a:t>
+            </a:r>
+            <a:r>
+              <a:rPr lang="en-US" altLang="zh-CN" dirty="0" err="1"/>
+              <a:t>SpatialLM</a:t>
+            </a:r>
+            <a:r>
+              <a:rPr lang="en-US" altLang="zh-CN" dirty="0"/>
+              <a:t>.</a:t>
+            </a:r>
+            <a:endParaRPr lang="zh-CN" altLang="en-US" dirty="0"/>
+          </a:p>
+        </p:txBody>
+      </p:sp>
+      <p:sp>
+        <p:nvSpPr>
+          <p:cNvPr id="33" name="文本框 32">
+            <a:extLst>
+              <a:ext uri="{FF2B5EF4-FFF2-40B4-BE49-F238E27FC236}">
+                <a16:creationId xmlns:a16="http://schemas.microsoft.com/office/drawing/2014/main" id="{19490E92-BF83-D9A6-E7D6-9841493BFCED}"/>
+              </a:ext>
+            </a:extLst>
+          </p:cNvPr>
+          <p:cNvSpPr txBox="1"/>
+          <p:nvPr/>
+        </p:nvSpPr>
+        <p:spPr>
+          <a:xfrm>
+            <a:off x="104361" y="4086765"/>
+            <a:ext cx="1316935" cy="369332"/>
+          </a:xfrm>
+          <a:prstGeom prst="rect">
+            <a:avLst/>
+          </a:prstGeom>
+          <a:noFill/>
+        </p:spPr>
+        <p:txBody>
+          <a:bodyPr wrap="square" rtlCol="0">
+            <a:spAutoFit/>
+          </a:bodyPr>
+          <a:lstStyle/>
+          <a:p>
+            <a:r>
+              <a:rPr lang="en-US" altLang="zh-CN" dirty="0"/>
+              <a:t>Notes:</a:t>
+            </a:r>
+            <a:endParaRPr lang="zh-CN" altLang="en-US" dirty="0"/>
+          </a:p>
+        </p:txBody>
+      </p:sp>
+      <p:sp>
+        <p:nvSpPr>
+          <p:cNvPr id="34" name="文本框 33">
+            <a:extLst>
+              <a:ext uri="{FF2B5EF4-FFF2-40B4-BE49-F238E27FC236}">
+                <a16:creationId xmlns:a16="http://schemas.microsoft.com/office/drawing/2014/main" id="{0EC00E08-8A78-CF2F-D06A-505750BC38A3}"/>
+              </a:ext>
+            </a:extLst>
+          </p:cNvPr>
+          <p:cNvSpPr txBox="1"/>
+          <p:nvPr/>
+        </p:nvSpPr>
+        <p:spPr>
+          <a:xfrm>
+            <a:off x="81998" y="114300"/>
+            <a:ext cx="3173067" cy="369332"/>
+          </a:xfrm>
+          <a:prstGeom prst="rect">
+            <a:avLst/>
+          </a:prstGeom>
+          <a:noFill/>
+        </p:spPr>
+        <p:txBody>
+          <a:bodyPr wrap="square" rtlCol="0">
+            <a:spAutoFit/>
+          </a:bodyPr>
+          <a:lstStyle/>
+          <a:p>
+            <a:r>
+              <a:rPr lang="en-US" altLang="zh-CN" dirty="0"/>
+              <a:t>AMAR ENGINE</a:t>
+            </a:r>
+            <a:endParaRPr lang="zh-CN" altLang="en-US" dirty="0"/>
+          </a:p>
+        </p:txBody>
+      </p:sp>
+      <p:sp>
+        <p:nvSpPr>
+          <p:cNvPr id="35" name="文本框 34">
+            <a:extLst>
+              <a:ext uri="{FF2B5EF4-FFF2-40B4-BE49-F238E27FC236}">
+                <a16:creationId xmlns:a16="http://schemas.microsoft.com/office/drawing/2014/main" id="{8F7F5F47-DAAD-CCCA-1923-407607941B71}"/>
+              </a:ext>
+            </a:extLst>
+          </p:cNvPr>
+          <p:cNvSpPr txBox="1"/>
+          <p:nvPr/>
+        </p:nvSpPr>
+        <p:spPr>
+          <a:xfrm>
+            <a:off x="104361" y="800100"/>
+            <a:ext cx="1041125" cy="261610"/>
+          </a:xfrm>
+          <a:prstGeom prst="rect">
+            <a:avLst/>
+          </a:prstGeom>
+          <a:noFill/>
+        </p:spPr>
+        <p:txBody>
+          <a:bodyPr wrap="square" rtlCol="0">
+            <a:spAutoFit/>
+          </a:bodyPr>
+          <a:lstStyle/>
+          <a:p>
+            <a:r>
+              <a:rPr lang="en-US" altLang="zh-CN" sz="1100" dirty="0" err="1"/>
+              <a:t>ceaserzhao</a:t>
+            </a:r>
+            <a:endParaRPr lang="zh-CN" altLang="en-US" sz="1100" dirty="0"/>
+          </a:p>
+        </p:txBody>
+      </p:sp>
+      <p:sp>
+        <p:nvSpPr>
+          <p:cNvPr id="36" name="矩形 35">
+            <a:extLst>
+              <a:ext uri="{FF2B5EF4-FFF2-40B4-BE49-F238E27FC236}">
+                <a16:creationId xmlns:a16="http://schemas.microsoft.com/office/drawing/2014/main" id="{4A1544BB-AF39-1C71-DF33-8DB37E71A01D}"/>
+              </a:ext>
+            </a:extLst>
+          </p:cNvPr>
+          <p:cNvSpPr/>
+          <p:nvPr/>
+        </p:nvSpPr>
+        <p:spPr>
+          <a:xfrm>
+            <a:off x="5744817" y="558284"/>
+            <a:ext cx="2932044" cy="1762503"/>
+          </a:xfrm>
+          <a:prstGeom prst="rect">
+            <a:avLst/>
+          </a:prstGeom>
+        </p:spPr>
+        <p:style>
+          <a:lnRef idx="1">
+            <a:schemeClr val="accent2"/>
+          </a:lnRef>
+          <a:fillRef idx="2">
+            <a:schemeClr val="accent2"/>
+          </a:fillRef>
+          <a:effectRef idx="1">
+            <a:schemeClr val="accent2"/>
+          </a:effectRef>
+          <a:fontRef idx="minor">
+            <a:schemeClr val="dk1"/>
+          </a:fontRef>
+        </p:style>
+        <p:txBody>
+          <a:bodyPr rtlCol="0" anchor="ctr"/>
+          <a:lstStyle/>
+          <a:p>
+            <a:pPr algn="ctr"/>
+            <a:endParaRPr lang="zh-CN" altLang="en-US"/>
+          </a:p>
+        </p:txBody>
+      </p:sp>
+      <p:sp>
+        <p:nvSpPr>
+          <p:cNvPr id="37" name="文本框 36">
+            <a:extLst>
+              <a:ext uri="{FF2B5EF4-FFF2-40B4-BE49-F238E27FC236}">
+                <a16:creationId xmlns:a16="http://schemas.microsoft.com/office/drawing/2014/main" id="{347E795D-4F29-B6D3-743C-EAC0C77F773F}"/>
+              </a:ext>
+            </a:extLst>
+          </p:cNvPr>
+          <p:cNvSpPr txBox="1"/>
+          <p:nvPr/>
+        </p:nvSpPr>
+        <p:spPr>
+          <a:xfrm>
+            <a:off x="6341164" y="646115"/>
+            <a:ext cx="2216426" cy="369332"/>
+          </a:xfrm>
+          <a:prstGeom prst="rect">
+            <a:avLst/>
+          </a:prstGeom>
+          <a:noFill/>
+        </p:spPr>
+        <p:txBody>
+          <a:bodyPr wrap="square" rtlCol="0">
+            <a:spAutoFit/>
+          </a:bodyPr>
+          <a:lstStyle/>
+          <a:p>
+            <a:r>
+              <a:rPr lang="en-US" altLang="zh-CN" dirty="0"/>
+              <a:t>AME ADMIN</a:t>
+            </a:r>
+            <a:endParaRPr lang="zh-CN" altLang="en-US" dirty="0"/>
+          </a:p>
+        </p:txBody>
+      </p:sp>
+      <p:sp>
+        <p:nvSpPr>
+          <p:cNvPr id="39" name="矩形 38">
+            <a:extLst>
+              <a:ext uri="{FF2B5EF4-FFF2-40B4-BE49-F238E27FC236}">
+                <a16:creationId xmlns:a16="http://schemas.microsoft.com/office/drawing/2014/main" id="{6CD7EADD-6243-D921-FA03-9AD0956E200C}"/>
+              </a:ext>
+            </a:extLst>
+          </p:cNvPr>
+          <p:cNvSpPr/>
+          <p:nvPr/>
+        </p:nvSpPr>
+        <p:spPr>
+          <a:xfrm>
+            <a:off x="4219161" y="3780494"/>
+            <a:ext cx="1604484" cy="552968"/>
+          </a:xfrm>
+          <a:prstGeom prst="rect">
+            <a:avLst/>
+          </a:prstGeom>
+        </p:spPr>
+        <p:style>
+          <a:lnRef idx="2">
+            <a:schemeClr val="accent6">
+              <a:shade val="15000"/>
+            </a:schemeClr>
+          </a:lnRef>
+          <a:fillRef idx="1">
+            <a:schemeClr val="accent6"/>
+          </a:fillRef>
+          <a:effectRef idx="0">
+            <a:schemeClr val="accent6"/>
+          </a:effectRef>
+          <a:fontRef idx="minor">
+            <a:schemeClr val="lt1"/>
+          </a:fontRef>
+        </p:style>
+        <p:txBody>
+          <a:bodyPr rtlCol="0" anchor="ctr"/>
+          <a:lstStyle/>
+          <a:p>
+            <a:pPr algn="ctr"/>
+            <a:endParaRPr lang="zh-CN" altLang="en-US"/>
+          </a:p>
+        </p:txBody>
+      </p:sp>
+      <p:sp>
+        <p:nvSpPr>
+          <p:cNvPr id="38" name="箭头: 右 37">
+            <a:extLst>
+              <a:ext uri="{FF2B5EF4-FFF2-40B4-BE49-F238E27FC236}">
+                <a16:creationId xmlns:a16="http://schemas.microsoft.com/office/drawing/2014/main" id="{A147669C-5D84-B053-896E-C267DF095108}"/>
+              </a:ext>
+            </a:extLst>
+          </p:cNvPr>
+          <p:cNvSpPr/>
+          <p:nvPr/>
+        </p:nvSpPr>
+        <p:spPr>
+          <a:xfrm rot="2002163">
+            <a:off x="3215173" y="3686588"/>
+            <a:ext cx="1152525" cy="94422"/>
+          </a:xfrm>
+          <a:prstGeom prst="rightArrow">
+            <a:avLst/>
+          </a:prstGeom>
+        </p:spPr>
+        <p:style>
+          <a:lnRef idx="2">
+            <a:schemeClr val="accent1">
+              <a:shade val="15000"/>
+            </a:schemeClr>
+          </a:lnRef>
+          <a:fillRef idx="1">
+            <a:schemeClr val="accent1"/>
+          </a:fillRef>
+          <a:effectRef idx="0">
+            <a:schemeClr val="accent1"/>
+          </a:effectRef>
+          <a:fontRef idx="minor">
+            <a:schemeClr val="lt1"/>
+          </a:fontRef>
+        </p:style>
+        <p:txBody>
+          <a:bodyPr rtlCol="0" anchor="ctr"/>
+          <a:lstStyle/>
+          <a:p>
+            <a:pPr algn="ctr"/>
+            <a:endParaRPr lang="zh-CN" altLang="en-US"/>
+          </a:p>
+        </p:txBody>
+      </p:sp>
+      <p:sp>
+        <p:nvSpPr>
+          <p:cNvPr id="40" name="文本框 39">
+            <a:extLst>
+              <a:ext uri="{FF2B5EF4-FFF2-40B4-BE49-F238E27FC236}">
+                <a16:creationId xmlns:a16="http://schemas.microsoft.com/office/drawing/2014/main" id="{3169AFDA-52E0-C61E-B0EA-F90CCD6F3261}"/>
+              </a:ext>
+            </a:extLst>
+          </p:cNvPr>
+          <p:cNvSpPr txBox="1"/>
+          <p:nvPr/>
+        </p:nvSpPr>
+        <p:spPr>
+          <a:xfrm>
+            <a:off x="4219157" y="3872312"/>
+            <a:ext cx="1729418" cy="369332"/>
+          </a:xfrm>
+          <a:prstGeom prst="rect">
+            <a:avLst/>
+          </a:prstGeom>
+          <a:noFill/>
+        </p:spPr>
+        <p:txBody>
+          <a:bodyPr wrap="square" rtlCol="0">
+            <a:spAutoFit/>
+          </a:bodyPr>
+          <a:lstStyle/>
+          <a:p>
+            <a:r>
+              <a:rPr lang="en-US" altLang="zh-CN" dirty="0"/>
+              <a:t>AME SCANNER</a:t>
             </a:r>
             <a:endParaRPr lang="zh-CN" altLang="en-US" dirty="0"/>
           </a:p>

--- a/docs/overview.pptx
+++ b/docs/overview.pptx
@@ -3764,6 +3764,94 @@
       </p:grpSpPr>
       <p:sp>
         <p:nvSpPr>
+          <p:cNvPr id="53" name="矩形 52">
+            <a:extLst>
+              <a:ext uri="{FF2B5EF4-FFF2-40B4-BE49-F238E27FC236}">
+                <a16:creationId xmlns:a16="http://schemas.microsoft.com/office/drawing/2014/main" id="{8A767945-2F1C-E6A0-D465-7D0850E0514B}"/>
+              </a:ext>
+            </a:extLst>
+          </p:cNvPr>
+          <p:cNvSpPr/>
+          <p:nvPr/>
+        </p:nvSpPr>
+        <p:spPr>
+          <a:xfrm>
+            <a:off x="81998" y="5198169"/>
+            <a:ext cx="2425810" cy="615779"/>
+          </a:xfrm>
+          <a:prstGeom prst="rect">
+            <a:avLst/>
+          </a:prstGeom>
+        </p:spPr>
+        <p:style>
+          <a:lnRef idx="2">
+            <a:schemeClr val="accent4"/>
+          </a:lnRef>
+          <a:fillRef idx="1">
+            <a:schemeClr val="lt1"/>
+          </a:fillRef>
+          <a:effectRef idx="0">
+            <a:schemeClr val="accent4"/>
+          </a:effectRef>
+          <a:fontRef idx="minor">
+            <a:schemeClr val="dk1"/>
+          </a:fontRef>
+        </p:style>
+        <p:txBody>
+          <a:bodyPr rtlCol="0" anchor="ctr"/>
+          <a:lstStyle/>
+          <a:p>
+            <a:pPr algn="ctr"/>
+            <a:endParaRPr lang="zh-CN" altLang="en-US"/>
+          </a:p>
+        </p:txBody>
+      </p:sp>
+      <p:sp>
+        <p:nvSpPr>
+          <p:cNvPr id="49" name="矩形 48">
+            <a:extLst>
+              <a:ext uri="{FF2B5EF4-FFF2-40B4-BE49-F238E27FC236}">
+                <a16:creationId xmlns:a16="http://schemas.microsoft.com/office/drawing/2014/main" id="{51D13E15-AC94-633D-5CED-1A5950B4E791}"/>
+              </a:ext>
+            </a:extLst>
+          </p:cNvPr>
+          <p:cNvSpPr/>
+          <p:nvPr/>
+        </p:nvSpPr>
+        <p:spPr>
+          <a:xfrm>
+            <a:off x="71396" y="4489659"/>
+            <a:ext cx="2436412" cy="646331"/>
+          </a:xfrm>
+          <a:prstGeom prst="rect">
+            <a:avLst/>
+          </a:prstGeom>
+        </p:spPr>
+        <p:style>
+          <a:lnRef idx="2">
+            <a:schemeClr val="accent4"/>
+          </a:lnRef>
+          <a:fillRef idx="1">
+            <a:schemeClr val="lt1"/>
+          </a:fillRef>
+          <a:effectRef idx="0">
+            <a:schemeClr val="accent4"/>
+          </a:effectRef>
+          <a:fontRef idx="minor">
+            <a:schemeClr val="dk1"/>
+          </a:fontRef>
+        </p:style>
+        <p:txBody>
+          <a:bodyPr rtlCol="0" anchor="ctr"/>
+          <a:lstStyle/>
+          <a:p>
+            <a:pPr algn="ctr"/>
+            <a:endParaRPr lang="zh-CN" altLang="en-US" dirty="0"/>
+          </a:p>
+        </p:txBody>
+      </p:sp>
+      <p:sp>
+        <p:nvSpPr>
           <p:cNvPr id="8" name="矩形 7">
             <a:extLst>
               <a:ext uri="{FF2B5EF4-FFF2-40B4-BE49-F238E27FC236}">
@@ -4972,7 +5060,7 @@
         </p:nvSpPr>
         <p:spPr>
           <a:xfrm>
-            <a:off x="81998" y="114300"/>
+            <a:off x="160682" y="99946"/>
             <a:ext cx="3173067" cy="369332"/>
           </a:xfrm>
           <a:prstGeom prst="rect">
@@ -4987,10 +5075,16 @@
           <a:lstStyle/>
           <a:p>
             <a:r>
-              <a:rPr lang="en-US" altLang="zh-CN" dirty="0"/>
+              <a:rPr lang="en-US" altLang="zh-CN" dirty="0">
+                <a:latin typeface="Noto Sans JP Black" panose="020B0200000000000000" pitchFamily="34" charset="-122"/>
+                <a:ea typeface="Noto Sans JP Black" panose="020B0200000000000000" pitchFamily="34" charset="-122"/>
+              </a:rPr>
               <a:t>AMAR ENGINE</a:t>
             </a:r>
-            <a:endParaRPr lang="zh-CN" altLang="en-US" dirty="0"/>
+            <a:endParaRPr lang="zh-CN" altLang="en-US" dirty="0">
+              <a:latin typeface="Noto Sans JP Black" panose="020B0200000000000000" pitchFamily="34" charset="-122"/>
+              <a:ea typeface="Noto Sans JP Black" panose="020B0200000000000000" pitchFamily="34" charset="-122"/>
+            </a:endParaRPr>
           </a:p>
         </p:txBody>
       </p:sp>
@@ -5023,10 +5117,14 @@
           <a:lstStyle/>
           <a:p>
             <a:r>
-              <a:rPr lang="en-US" altLang="zh-CN" sz="1100" dirty="0" err="1"/>
+              <a:rPr lang="en-US" altLang="zh-CN" sz="1100" dirty="0" err="1">
+                <a:latin typeface="Britannic Bold" panose="020B0903060703020204" pitchFamily="34" charset="0"/>
+              </a:rPr>
               <a:t>ceaserzhao</a:t>
             </a:r>
-            <a:endParaRPr lang="zh-CN" altLang="en-US" sz="1100" dirty="0"/>
+            <a:endParaRPr lang="zh-CN" altLang="en-US" sz="1100" dirty="0">
+              <a:latin typeface="Britannic Bold" panose="020B0903060703020204" pitchFamily="34" charset="0"/>
+            </a:endParaRPr>
           </a:p>
         </p:txBody>
       </p:sp>
@@ -5044,7 +5142,7 @@
         </p:nvSpPr>
         <p:spPr>
           <a:xfrm>
-            <a:off x="5744817" y="558284"/>
+            <a:off x="5554173" y="631134"/>
             <a:ext cx="2932044" cy="1762503"/>
           </a:xfrm>
           <a:prstGeom prst="rect">
@@ -5235,6 +5333,248 @@
               <a:t>AME SCANNER</a:t>
             </a:r>
             <a:endParaRPr lang="zh-CN" altLang="en-US" dirty="0"/>
+          </a:p>
+        </p:txBody>
+      </p:sp>
+      <p:pic>
+        <p:nvPicPr>
+          <p:cNvPr id="42" name="图片 41" descr="徽标, 公司名称&#10;&#10;AI 生成的内容可能不正确。">
+            <a:extLst>
+              <a:ext uri="{FF2B5EF4-FFF2-40B4-BE49-F238E27FC236}">
+                <a16:creationId xmlns:a16="http://schemas.microsoft.com/office/drawing/2014/main" id="{1185C566-0941-CCAE-731E-B1D0F3C298BF}"/>
+              </a:ext>
+            </a:extLst>
+          </p:cNvPr>
+          <p:cNvPicPr>
+            <a:picLocks noChangeAspect="1"/>
+          </p:cNvPicPr>
+          <p:nvPr/>
+        </p:nvPicPr>
+        <p:blipFill>
+          <a:blip r:embed="rId3">
+            <a:extLst>
+              <a:ext uri="{28A0092B-C50C-407E-A947-70E740481C1C}">
+                <a14:useLocalDpi xmlns:a14="http://schemas.microsoft.com/office/drawing/2010/main" val="0"/>
+              </a:ext>
+            </a:extLst>
+          </a:blip>
+          <a:stretch>
+            <a:fillRect/>
+          </a:stretch>
+        </p:blipFill>
+        <p:spPr>
+          <a:xfrm>
+            <a:off x="89866" y="1267033"/>
+            <a:ext cx="930965" cy="930965"/>
+          </a:xfrm>
+          <a:prstGeom prst="rect">
+            <a:avLst/>
+          </a:prstGeom>
+        </p:spPr>
+      </p:pic>
+      <p:sp>
+        <p:nvSpPr>
+          <p:cNvPr id="43" name="箭头: 右 42">
+            <a:extLst>
+              <a:ext uri="{FF2B5EF4-FFF2-40B4-BE49-F238E27FC236}">
+                <a16:creationId xmlns:a16="http://schemas.microsoft.com/office/drawing/2014/main" id="{BE5614AD-DE1D-D731-B3EC-78B017719254}"/>
+              </a:ext>
+            </a:extLst>
+          </p:cNvPr>
+          <p:cNvSpPr/>
+          <p:nvPr/>
+        </p:nvSpPr>
+        <p:spPr>
+          <a:xfrm>
+            <a:off x="8348870" y="1263650"/>
+            <a:ext cx="984387" cy="461407"/>
+          </a:xfrm>
+          <a:prstGeom prst="rightArrow">
+            <a:avLst/>
+          </a:prstGeom>
+        </p:spPr>
+        <p:style>
+          <a:lnRef idx="2">
+            <a:schemeClr val="accent1">
+              <a:shade val="15000"/>
+            </a:schemeClr>
+          </a:lnRef>
+          <a:fillRef idx="1">
+            <a:schemeClr val="accent1"/>
+          </a:fillRef>
+          <a:effectRef idx="0">
+            <a:schemeClr val="accent1"/>
+          </a:effectRef>
+          <a:fontRef idx="minor">
+            <a:schemeClr val="lt1"/>
+          </a:fontRef>
+        </p:style>
+        <p:txBody>
+          <a:bodyPr rtlCol="0" anchor="ctr"/>
+          <a:lstStyle/>
+          <a:p>
+            <a:pPr algn="ctr"/>
+            <a:endParaRPr lang="zh-CN" altLang="en-US"/>
+          </a:p>
+        </p:txBody>
+      </p:sp>
+      <p:sp>
+        <p:nvSpPr>
+          <p:cNvPr id="44" name="椭圆 43">
+            <a:extLst>
+              <a:ext uri="{FF2B5EF4-FFF2-40B4-BE49-F238E27FC236}">
+                <a16:creationId xmlns:a16="http://schemas.microsoft.com/office/drawing/2014/main" id="{7507A5E4-71F8-791F-BCCC-06F99122A4FE}"/>
+              </a:ext>
+            </a:extLst>
+          </p:cNvPr>
+          <p:cNvSpPr/>
+          <p:nvPr/>
+        </p:nvSpPr>
+        <p:spPr>
+          <a:xfrm>
+            <a:off x="8887789" y="1390608"/>
+            <a:ext cx="165100" cy="177800"/>
+          </a:xfrm>
+          <a:prstGeom prst="ellipse">
+            <a:avLst/>
+          </a:prstGeom>
+        </p:spPr>
+        <p:style>
+          <a:lnRef idx="2">
+            <a:schemeClr val="accent2">
+              <a:shade val="15000"/>
+            </a:schemeClr>
+          </a:lnRef>
+          <a:fillRef idx="1">
+            <a:schemeClr val="accent2"/>
+          </a:fillRef>
+          <a:effectRef idx="0">
+            <a:schemeClr val="accent2"/>
+          </a:effectRef>
+          <a:fontRef idx="minor">
+            <a:schemeClr val="lt1"/>
+          </a:fontRef>
+        </p:style>
+        <p:txBody>
+          <a:bodyPr rtlCol="0" anchor="ctr"/>
+          <a:lstStyle/>
+          <a:p>
+            <a:pPr algn="ctr"/>
+            <a:endParaRPr lang="zh-CN" altLang="en-US"/>
+          </a:p>
+        </p:txBody>
+      </p:sp>
+      <p:sp>
+        <p:nvSpPr>
+          <p:cNvPr id="45" name="文本框 44">
+            <a:extLst>
+              <a:ext uri="{FF2B5EF4-FFF2-40B4-BE49-F238E27FC236}">
+                <a16:creationId xmlns:a16="http://schemas.microsoft.com/office/drawing/2014/main" id="{793CA584-C824-EF90-2C46-ADFFCFEF5D1B}"/>
+              </a:ext>
+            </a:extLst>
+          </p:cNvPr>
+          <p:cNvSpPr txBox="1"/>
+          <p:nvPr/>
+        </p:nvSpPr>
+        <p:spPr>
+          <a:xfrm>
+            <a:off x="8875955" y="1341008"/>
+            <a:ext cx="104775" cy="276999"/>
+          </a:xfrm>
+          <a:prstGeom prst="rect">
+            <a:avLst/>
+          </a:prstGeom>
+          <a:noFill/>
+        </p:spPr>
+        <p:txBody>
+          <a:bodyPr wrap="square" rtlCol="0">
+            <a:spAutoFit/>
+          </a:bodyPr>
+          <a:lstStyle/>
+          <a:p>
+            <a:r>
+              <a:rPr lang="en-US" altLang="zh-CN" sz="1200" dirty="0"/>
+              <a:t>2</a:t>
+            </a:r>
+            <a:endParaRPr lang="zh-CN" altLang="en-US" sz="1200" dirty="0"/>
+          </a:p>
+        </p:txBody>
+      </p:sp>
+      <p:sp>
+        <p:nvSpPr>
+          <p:cNvPr id="48" name="文本框 47">
+            <a:extLst>
+              <a:ext uri="{FF2B5EF4-FFF2-40B4-BE49-F238E27FC236}">
+                <a16:creationId xmlns:a16="http://schemas.microsoft.com/office/drawing/2014/main" id="{F354C7C6-FB1B-9D3D-BFC1-05AE942125F9}"/>
+              </a:ext>
+            </a:extLst>
+          </p:cNvPr>
+          <p:cNvSpPr txBox="1"/>
+          <p:nvPr/>
+        </p:nvSpPr>
+        <p:spPr>
+          <a:xfrm>
+            <a:off x="104361" y="5151804"/>
+            <a:ext cx="2251710" cy="646331"/>
+          </a:xfrm>
+          <a:prstGeom prst="rect">
+            <a:avLst/>
+          </a:prstGeom>
+          <a:noFill/>
+        </p:spPr>
+        <p:txBody>
+          <a:bodyPr wrap="square" rtlCol="0">
+            <a:spAutoFit/>
+          </a:bodyPr>
+          <a:lstStyle/>
+          <a:p>
+            <a:r>
+              <a:rPr lang="en-US" altLang="zh-CN" dirty="0"/>
+              <a:t>2.A series of complex processes</a:t>
+            </a:r>
+            <a:endParaRPr lang="zh-CN" altLang="en-US" dirty="0"/>
+          </a:p>
+        </p:txBody>
+      </p:sp>
+      <p:sp>
+        <p:nvSpPr>
+          <p:cNvPr id="54" name="文本框 53">
+            <a:extLst>
+              <a:ext uri="{FF2B5EF4-FFF2-40B4-BE49-F238E27FC236}">
+                <a16:creationId xmlns:a16="http://schemas.microsoft.com/office/drawing/2014/main" id="{50295B0E-594C-85D8-8168-93220D4456C5}"/>
+              </a:ext>
+            </a:extLst>
+          </p:cNvPr>
+          <p:cNvSpPr txBox="1"/>
+          <p:nvPr/>
+        </p:nvSpPr>
+        <p:spPr>
+          <a:xfrm>
+            <a:off x="119818" y="1002639"/>
+            <a:ext cx="1130892" cy="230832"/>
+          </a:xfrm>
+          <a:prstGeom prst="rect">
+            <a:avLst/>
+          </a:prstGeom>
+          <a:noFill/>
+        </p:spPr>
+        <p:txBody>
+          <a:bodyPr wrap="square" rtlCol="0">
+            <a:spAutoFit/>
+          </a:bodyPr>
+          <a:lstStyle/>
+          <a:p>
+            <a:r>
+              <a:rPr lang="en-US" altLang="zh-CN" sz="900" dirty="0">
+                <a:latin typeface="BIZ UDGothic" panose="020B0400000000000000" pitchFamily="33" charset="-128"/>
+                <a:ea typeface="BIZ UDGothic" panose="020B0400000000000000" pitchFamily="33" charset="-128"/>
+              </a:rPr>
+              <a:t>2.23.2026</a:t>
+            </a:r>
+            <a:endParaRPr lang="zh-CN" altLang="en-US" sz="900" dirty="0">
+              <a:latin typeface="BIZ UDGothic" panose="020B0400000000000000" pitchFamily="33" charset="-128"/>
+              <a:ea typeface="BIZ UDGothic" panose="020B0400000000000000" pitchFamily="33" charset="-128"/>
+            </a:endParaRPr>
           </a:p>
         </p:txBody>
       </p:sp>

--- a/docs/overview.pptx
+++ b/docs/overview.pptx
@@ -5575,6 +5575,134 @@
               <a:latin typeface="BIZ UDGothic" panose="020B0400000000000000" pitchFamily="33" charset="-128"/>
               <a:ea typeface="BIZ UDGothic" panose="020B0400000000000000" pitchFamily="33" charset="-128"/>
             </a:endParaRPr>
+          </a:p>
+        </p:txBody>
+      </p:sp>
+      <p:sp>
+        <p:nvSpPr>
+          <p:cNvPr id="55" name="矩形 54">
+            <a:extLst>
+              <a:ext uri="{FF2B5EF4-FFF2-40B4-BE49-F238E27FC236}">
+                <a16:creationId xmlns:a16="http://schemas.microsoft.com/office/drawing/2014/main" id="{A94C40C3-64B0-CCA4-53B5-999BD45EED56}"/>
+              </a:ext>
+            </a:extLst>
+          </p:cNvPr>
+          <p:cNvSpPr/>
+          <p:nvPr/>
+        </p:nvSpPr>
+        <p:spPr>
+          <a:xfrm>
+            <a:off x="6019800" y="3042682"/>
+            <a:ext cx="2329070" cy="919718"/>
+          </a:xfrm>
+          <a:prstGeom prst="rect">
+            <a:avLst/>
+          </a:prstGeom>
+        </p:spPr>
+        <p:style>
+          <a:lnRef idx="2">
+            <a:schemeClr val="accent1">
+              <a:shade val="15000"/>
+            </a:schemeClr>
+          </a:lnRef>
+          <a:fillRef idx="1">
+            <a:schemeClr val="accent1"/>
+          </a:fillRef>
+          <a:effectRef idx="0">
+            <a:schemeClr val="accent1"/>
+          </a:effectRef>
+          <a:fontRef idx="minor">
+            <a:schemeClr val="lt1"/>
+          </a:fontRef>
+        </p:style>
+        <p:txBody>
+          <a:bodyPr rtlCol="0" anchor="ctr"/>
+          <a:lstStyle/>
+          <a:p>
+            <a:pPr algn="ctr"/>
+            <a:endParaRPr lang="zh-CN" altLang="en-US"/>
+          </a:p>
+        </p:txBody>
+      </p:sp>
+      <p:sp>
+        <p:nvSpPr>
+          <p:cNvPr id="56" name="椭圆 55">
+            <a:extLst>
+              <a:ext uri="{FF2B5EF4-FFF2-40B4-BE49-F238E27FC236}">
+                <a16:creationId xmlns:a16="http://schemas.microsoft.com/office/drawing/2014/main" id="{7C41404F-074F-EFA6-6F99-23FE4C2D4586}"/>
+              </a:ext>
+            </a:extLst>
+          </p:cNvPr>
+          <p:cNvSpPr/>
+          <p:nvPr/>
+        </p:nvSpPr>
+        <p:spPr>
+          <a:xfrm>
+            <a:off x="8137250" y="3101975"/>
+            <a:ext cx="165100" cy="177800"/>
+          </a:xfrm>
+          <a:prstGeom prst="ellipse">
+            <a:avLst/>
+          </a:prstGeom>
+        </p:spPr>
+        <p:style>
+          <a:lnRef idx="2">
+            <a:schemeClr val="accent2">
+              <a:shade val="15000"/>
+            </a:schemeClr>
+          </a:lnRef>
+          <a:fillRef idx="1">
+            <a:schemeClr val="accent2"/>
+          </a:fillRef>
+          <a:effectRef idx="0">
+            <a:schemeClr val="accent2"/>
+          </a:effectRef>
+          <a:fontRef idx="minor">
+            <a:schemeClr val="lt1"/>
+          </a:fontRef>
+        </p:style>
+        <p:txBody>
+          <a:bodyPr rtlCol="0" anchor="ctr"/>
+          <a:lstStyle/>
+          <a:p>
+            <a:pPr algn="ctr"/>
+            <a:endParaRPr lang="zh-CN" altLang="en-US"/>
+          </a:p>
+        </p:txBody>
+      </p:sp>
+      <p:sp>
+        <p:nvSpPr>
+          <p:cNvPr id="57" name="文本框 56">
+            <a:extLst>
+              <a:ext uri="{FF2B5EF4-FFF2-40B4-BE49-F238E27FC236}">
+                <a16:creationId xmlns:a16="http://schemas.microsoft.com/office/drawing/2014/main" id="{B0104898-28DC-AACA-4AAD-10E7B0A39FC3}"/>
+              </a:ext>
+            </a:extLst>
+          </p:cNvPr>
+          <p:cNvSpPr txBox="1"/>
+          <p:nvPr/>
+        </p:nvSpPr>
+        <p:spPr>
+          <a:xfrm>
+            <a:off x="8119510" y="3064204"/>
+            <a:ext cx="126206" cy="276999"/>
+          </a:xfrm>
+          <a:prstGeom prst="rect">
+            <a:avLst/>
+          </a:prstGeom>
+          <a:noFill/>
+        </p:spPr>
+        <p:txBody>
+          <a:bodyPr wrap="square" rtlCol="0">
+            <a:spAutoFit/>
+          </a:bodyPr>
+          <a:lstStyle/>
+          <a:p>
+            <a:r>
+              <a:rPr lang="en-US" altLang="zh-CN" sz="1200" dirty="0"/>
+              <a:t>3</a:t>
+            </a:r>
+            <a:endParaRPr lang="zh-CN" altLang="en-US" sz="1200" dirty="0"/>
           </a:p>
         </p:txBody>
       </p:sp>

--- a/docs/overview.pptx
+++ b/docs/overview.pptx
@@ -197,7 +197,7 @@
           <a:p>
             <a:fld id="{CAC5895B-3708-46E1-A199-8735536F71F9}" type="datetimeFigureOut">
               <a:rPr lang="zh-CN" altLang="en-US" smtClean="0"/>
-              <a:t>2026/2/23</a:t>
+              <a:t>2026/2/24</a:t>
             </a:fld>
             <a:endParaRPr lang="zh-CN" altLang="en-US"/>
           </a:p>
@@ -695,7 +695,7 @@
           <a:p>
             <a:fld id="{0B98B24C-C9E3-4F8A-B4AE-8209A59F7979}" type="datetimeFigureOut">
               <a:rPr lang="zh-CN" altLang="en-US" smtClean="0"/>
-              <a:t>2026/2/23</a:t>
+              <a:t>2026/2/24</a:t>
             </a:fld>
             <a:endParaRPr lang="zh-CN" altLang="en-US"/>
           </a:p>
@@ -893,7 +893,7 @@
           <a:p>
             <a:fld id="{0B98B24C-C9E3-4F8A-B4AE-8209A59F7979}" type="datetimeFigureOut">
               <a:rPr lang="zh-CN" altLang="en-US" smtClean="0"/>
-              <a:t>2026/2/23</a:t>
+              <a:t>2026/2/24</a:t>
             </a:fld>
             <a:endParaRPr lang="zh-CN" altLang="en-US"/>
           </a:p>
@@ -1101,7 +1101,7 @@
           <a:p>
             <a:fld id="{0B98B24C-C9E3-4F8A-B4AE-8209A59F7979}" type="datetimeFigureOut">
               <a:rPr lang="zh-CN" altLang="en-US" smtClean="0"/>
-              <a:t>2026/2/23</a:t>
+              <a:t>2026/2/24</a:t>
             </a:fld>
             <a:endParaRPr lang="zh-CN" altLang="en-US"/>
           </a:p>
@@ -1299,7 +1299,7 @@
           <a:p>
             <a:fld id="{0B98B24C-C9E3-4F8A-B4AE-8209A59F7979}" type="datetimeFigureOut">
               <a:rPr lang="zh-CN" altLang="en-US" smtClean="0"/>
-              <a:t>2026/2/23</a:t>
+              <a:t>2026/2/24</a:t>
             </a:fld>
             <a:endParaRPr lang="zh-CN" altLang="en-US"/>
           </a:p>
@@ -1574,7 +1574,7 @@
           <a:p>
             <a:fld id="{0B98B24C-C9E3-4F8A-B4AE-8209A59F7979}" type="datetimeFigureOut">
               <a:rPr lang="zh-CN" altLang="en-US" smtClean="0"/>
-              <a:t>2026/2/23</a:t>
+              <a:t>2026/2/24</a:t>
             </a:fld>
             <a:endParaRPr lang="zh-CN" altLang="en-US"/>
           </a:p>
@@ -1839,7 +1839,7 @@
           <a:p>
             <a:fld id="{0B98B24C-C9E3-4F8A-B4AE-8209A59F7979}" type="datetimeFigureOut">
               <a:rPr lang="zh-CN" altLang="en-US" smtClean="0"/>
-              <a:t>2026/2/23</a:t>
+              <a:t>2026/2/24</a:t>
             </a:fld>
             <a:endParaRPr lang="zh-CN" altLang="en-US"/>
           </a:p>
@@ -2251,7 +2251,7 @@
           <a:p>
             <a:fld id="{0B98B24C-C9E3-4F8A-B4AE-8209A59F7979}" type="datetimeFigureOut">
               <a:rPr lang="zh-CN" altLang="en-US" smtClean="0"/>
-              <a:t>2026/2/23</a:t>
+              <a:t>2026/2/24</a:t>
             </a:fld>
             <a:endParaRPr lang="zh-CN" altLang="en-US"/>
           </a:p>
@@ -2392,7 +2392,7 @@
           <a:p>
             <a:fld id="{0B98B24C-C9E3-4F8A-B4AE-8209A59F7979}" type="datetimeFigureOut">
               <a:rPr lang="zh-CN" altLang="en-US" smtClean="0"/>
-              <a:t>2026/2/23</a:t>
+              <a:t>2026/2/24</a:t>
             </a:fld>
             <a:endParaRPr lang="zh-CN" altLang="en-US"/>
           </a:p>
@@ -2505,7 +2505,7 @@
           <a:p>
             <a:fld id="{0B98B24C-C9E3-4F8A-B4AE-8209A59F7979}" type="datetimeFigureOut">
               <a:rPr lang="zh-CN" altLang="en-US" smtClean="0"/>
-              <a:t>2026/2/23</a:t>
+              <a:t>2026/2/24</a:t>
             </a:fld>
             <a:endParaRPr lang="zh-CN" altLang="en-US"/>
           </a:p>
@@ -2816,7 +2816,7 @@
           <a:p>
             <a:fld id="{0B98B24C-C9E3-4F8A-B4AE-8209A59F7979}" type="datetimeFigureOut">
               <a:rPr lang="zh-CN" altLang="en-US" smtClean="0"/>
-              <a:t>2026/2/23</a:t>
+              <a:t>2026/2/24</a:t>
             </a:fld>
             <a:endParaRPr lang="zh-CN" altLang="en-US"/>
           </a:p>
@@ -3104,7 +3104,7 @@
           <a:p>
             <a:fld id="{0B98B24C-C9E3-4F8A-B4AE-8209A59F7979}" type="datetimeFigureOut">
               <a:rPr lang="zh-CN" altLang="en-US" smtClean="0"/>
-              <a:t>2026/2/23</a:t>
+              <a:t>2026/2/24</a:t>
             </a:fld>
             <a:endParaRPr lang="zh-CN" altLang="en-US"/>
           </a:p>
@@ -3345,7 +3345,7 @@
           <a:p>
             <a:fld id="{0B98B24C-C9E3-4F8A-B4AE-8209A59F7979}" type="datetimeFigureOut">
               <a:rPr lang="zh-CN" altLang="en-US" smtClean="0"/>
-              <a:t>2026/2/23</a:t>
+              <a:t>2026/2/24</a:t>
             </a:fld>
             <a:endParaRPr lang="zh-CN" altLang="en-US"/>
           </a:p>
@@ -3764,6 +3764,50 @@
       </p:grpSpPr>
       <p:sp>
         <p:nvSpPr>
+          <p:cNvPr id="62" name="矩形 61">
+            <a:extLst>
+              <a:ext uri="{FF2B5EF4-FFF2-40B4-BE49-F238E27FC236}">
+                <a16:creationId xmlns:a16="http://schemas.microsoft.com/office/drawing/2014/main" id="{5BE91CDD-C68E-59CC-BA62-6297C4EBBCC4}"/>
+              </a:ext>
+            </a:extLst>
+          </p:cNvPr>
+          <p:cNvSpPr/>
+          <p:nvPr/>
+        </p:nvSpPr>
+        <p:spPr>
+          <a:xfrm>
+            <a:off x="81998" y="5883965"/>
+            <a:ext cx="2800350" cy="850559"/>
+          </a:xfrm>
+          <a:prstGeom prst="rect">
+            <a:avLst/>
+          </a:prstGeom>
+        </p:spPr>
+        <p:style>
+          <a:lnRef idx="2">
+            <a:schemeClr val="accent4"/>
+          </a:lnRef>
+          <a:fillRef idx="1">
+            <a:schemeClr val="lt1"/>
+          </a:fillRef>
+          <a:effectRef idx="0">
+            <a:schemeClr val="accent4"/>
+          </a:effectRef>
+          <a:fontRef idx="minor">
+            <a:schemeClr val="dk1"/>
+          </a:fontRef>
+        </p:style>
+        <p:txBody>
+          <a:bodyPr rtlCol="0" anchor="ctr"/>
+          <a:lstStyle/>
+          <a:p>
+            <a:pPr algn="ctr"/>
+            <a:endParaRPr lang="zh-CN" altLang="en-US"/>
+          </a:p>
+        </p:txBody>
+      </p:sp>
+      <p:sp>
+        <p:nvSpPr>
           <p:cNvPr id="53" name="矩形 52">
             <a:extLst>
               <a:ext uri="{FF2B5EF4-FFF2-40B4-BE49-F238E27FC236}">
@@ -5142,25 +5186,27 @@
         </p:nvSpPr>
         <p:spPr>
           <a:xfrm>
-            <a:off x="5554173" y="631134"/>
-            <a:ext cx="2932044" cy="1762503"/>
+            <a:off x="5611841" y="502942"/>
+            <a:ext cx="2737025" cy="5048228"/>
           </a:xfrm>
           <a:prstGeom prst="rect">
             <a:avLst/>
           </a:prstGeom>
         </p:spPr>
         <p:style>
-          <a:lnRef idx="1">
-            <a:schemeClr val="accent2"/>
+          <a:lnRef idx="2">
+            <a:schemeClr val="accent2">
+              <a:shade val="15000"/>
+            </a:schemeClr>
           </a:lnRef>
-          <a:fillRef idx="2">
+          <a:fillRef idx="1">
             <a:schemeClr val="accent2"/>
           </a:fillRef>
-          <a:effectRef idx="1">
+          <a:effectRef idx="0">
             <a:schemeClr val="accent2"/>
           </a:effectRef>
           <a:fontRef idx="minor">
-            <a:schemeClr val="dk1"/>
+            <a:schemeClr val="lt1"/>
           </a:fontRef>
         </p:style>
         <p:txBody>
@@ -5168,7 +5214,7 @@
           <a:lstStyle/>
           <a:p>
             <a:pPr algn="ctr"/>
-            <a:endParaRPr lang="zh-CN" altLang="en-US"/>
+            <a:endParaRPr lang="zh-CN" altLang="en-US" dirty="0"/>
           </a:p>
         </p:txBody>
       </p:sp>
@@ -5592,7 +5638,7 @@
         </p:nvSpPr>
         <p:spPr>
           <a:xfrm>
-            <a:off x="6019800" y="3042682"/>
+            <a:off x="5916646" y="4489659"/>
             <a:ext cx="2329070" cy="919718"/>
           </a:xfrm>
           <a:prstGeom prst="rect">
@@ -5620,7 +5666,7 @@
           <a:lstStyle/>
           <a:p>
             <a:pPr algn="ctr"/>
-            <a:endParaRPr lang="zh-CN" altLang="en-US"/>
+            <a:endParaRPr lang="zh-CN" altLang="en-US" dirty="0"/>
           </a:p>
         </p:txBody>
       </p:sp>
@@ -5703,6 +5749,380 @@
               <a:t>3</a:t>
             </a:r>
             <a:endParaRPr lang="zh-CN" altLang="en-US" sz="1200" dirty="0"/>
+          </a:p>
+        </p:txBody>
+      </p:sp>
+      <p:sp>
+        <p:nvSpPr>
+          <p:cNvPr id="59" name="文本框 58">
+            <a:extLst>
+              <a:ext uri="{FF2B5EF4-FFF2-40B4-BE49-F238E27FC236}">
+                <a16:creationId xmlns:a16="http://schemas.microsoft.com/office/drawing/2014/main" id="{FFFDC12D-85AB-9D4D-9545-B52B2D7A92B1}"/>
+              </a:ext>
+            </a:extLst>
+          </p:cNvPr>
+          <p:cNvSpPr txBox="1"/>
+          <p:nvPr/>
+        </p:nvSpPr>
+        <p:spPr>
+          <a:xfrm rot="1143579">
+            <a:off x="3490096" y="3057217"/>
+            <a:ext cx="2800350" cy="246262"/>
+          </a:xfrm>
+          <a:prstGeom prst="rect">
+            <a:avLst/>
+          </a:prstGeom>
+          <a:noFill/>
+        </p:spPr>
+        <p:txBody>
+          <a:bodyPr wrap="square" rtlCol="0">
+            <a:spAutoFit/>
+          </a:bodyPr>
+          <a:lstStyle/>
+          <a:p>
+            <a:r>
+              <a:rPr lang="en-US" altLang="zh-CN" sz="1000" dirty="0"/>
+              <a:t>SKILLS, Or rather, a kind of standard</a:t>
+            </a:r>
+            <a:endParaRPr lang="zh-CN" altLang="en-US" sz="1000" dirty="0"/>
+          </a:p>
+        </p:txBody>
+      </p:sp>
+      <p:sp>
+        <p:nvSpPr>
+          <p:cNvPr id="60" name="文本框 59">
+            <a:extLst>
+              <a:ext uri="{FF2B5EF4-FFF2-40B4-BE49-F238E27FC236}">
+                <a16:creationId xmlns:a16="http://schemas.microsoft.com/office/drawing/2014/main" id="{B01BC64A-0B9C-7C8D-5128-C63671FE39D0}"/>
+              </a:ext>
+            </a:extLst>
+          </p:cNvPr>
+          <p:cNvSpPr txBox="1"/>
+          <p:nvPr/>
+        </p:nvSpPr>
+        <p:spPr>
+          <a:xfrm>
+            <a:off x="6242973" y="4751746"/>
+            <a:ext cx="1992276" cy="369332"/>
+          </a:xfrm>
+          <a:prstGeom prst="rect">
+            <a:avLst/>
+          </a:prstGeom>
+          <a:noFill/>
+        </p:spPr>
+        <p:txBody>
+          <a:bodyPr wrap="square" rtlCol="0">
+            <a:spAutoFit/>
+          </a:bodyPr>
+          <a:lstStyle/>
+          <a:p>
+            <a:r>
+              <a:rPr lang="en-US" altLang="zh-CN" dirty="0"/>
+              <a:t>Information pool</a:t>
+            </a:r>
+            <a:endParaRPr lang="zh-CN" altLang="en-US" dirty="0"/>
+          </a:p>
+        </p:txBody>
+      </p:sp>
+      <p:sp>
+        <p:nvSpPr>
+          <p:cNvPr id="61" name="文本框 60">
+            <a:extLst>
+              <a:ext uri="{FF2B5EF4-FFF2-40B4-BE49-F238E27FC236}">
+                <a16:creationId xmlns:a16="http://schemas.microsoft.com/office/drawing/2014/main" id="{4FCD0B7A-C985-AB96-0D55-2070385574F8}"/>
+              </a:ext>
+            </a:extLst>
+          </p:cNvPr>
+          <p:cNvSpPr txBox="1"/>
+          <p:nvPr/>
+        </p:nvSpPr>
+        <p:spPr>
+          <a:xfrm>
+            <a:off x="71396" y="5834724"/>
+            <a:ext cx="2847561" cy="923330"/>
+          </a:xfrm>
+          <a:prstGeom prst="rect">
+            <a:avLst/>
+          </a:prstGeom>
+          <a:noFill/>
+        </p:spPr>
+        <p:txBody>
+          <a:bodyPr wrap="square" rtlCol="0">
+            <a:spAutoFit/>
+          </a:bodyPr>
+          <a:lstStyle/>
+          <a:p>
+            <a:r>
+              <a:rPr lang="en-US" altLang="zh-CN" dirty="0"/>
+              <a:t>3.A brand new data format, similar to JSON, used to describe the world.</a:t>
+            </a:r>
+            <a:endParaRPr lang="zh-CN" altLang="en-US" dirty="0"/>
+          </a:p>
+        </p:txBody>
+      </p:sp>
+      <p:sp>
+        <p:nvSpPr>
+          <p:cNvPr id="64" name="矩形 63">
+            <a:extLst>
+              <a:ext uri="{FF2B5EF4-FFF2-40B4-BE49-F238E27FC236}">
+                <a16:creationId xmlns:a16="http://schemas.microsoft.com/office/drawing/2014/main" id="{07C96C36-189C-C3D9-BE5B-FAA9F27B3497}"/>
+              </a:ext>
+            </a:extLst>
+          </p:cNvPr>
+          <p:cNvSpPr/>
+          <p:nvPr/>
+        </p:nvSpPr>
+        <p:spPr>
+          <a:xfrm>
+            <a:off x="9355381" y="1128091"/>
+            <a:ext cx="1990410" cy="800760"/>
+          </a:xfrm>
+          <a:prstGeom prst="rect">
+            <a:avLst/>
+          </a:prstGeom>
+        </p:spPr>
+        <p:style>
+          <a:lnRef idx="2">
+            <a:schemeClr val="accent4">
+              <a:shade val="15000"/>
+            </a:schemeClr>
+          </a:lnRef>
+          <a:fillRef idx="1">
+            <a:schemeClr val="accent4"/>
+          </a:fillRef>
+          <a:effectRef idx="0">
+            <a:schemeClr val="accent4"/>
+          </a:effectRef>
+          <a:fontRef idx="minor">
+            <a:schemeClr val="lt1"/>
+          </a:fontRef>
+        </p:style>
+        <p:txBody>
+          <a:bodyPr rtlCol="0" anchor="ctr"/>
+          <a:lstStyle/>
+          <a:p>
+            <a:pPr algn="ctr"/>
+            <a:endParaRPr lang="zh-CN" altLang="en-US"/>
+          </a:p>
+        </p:txBody>
+      </p:sp>
+      <p:sp>
+        <p:nvSpPr>
+          <p:cNvPr id="65" name="文本框 64">
+            <a:extLst>
+              <a:ext uri="{FF2B5EF4-FFF2-40B4-BE49-F238E27FC236}">
+                <a16:creationId xmlns:a16="http://schemas.microsoft.com/office/drawing/2014/main" id="{F137B836-92A7-B07C-ED52-F2FE7B306DD5}"/>
+              </a:ext>
+            </a:extLst>
+          </p:cNvPr>
+          <p:cNvSpPr txBox="1"/>
+          <p:nvPr/>
+        </p:nvSpPr>
+        <p:spPr>
+          <a:xfrm>
+            <a:off x="9509259" y="1361799"/>
+            <a:ext cx="1768341" cy="369332"/>
+          </a:xfrm>
+          <a:prstGeom prst="rect">
+            <a:avLst/>
+          </a:prstGeom>
+          <a:noFill/>
+        </p:spPr>
+        <p:txBody>
+          <a:bodyPr wrap="square" rtlCol="0">
+            <a:spAutoFit/>
+          </a:bodyPr>
+          <a:lstStyle/>
+          <a:p>
+            <a:r>
+              <a:rPr lang="en-US" altLang="zh-CN" dirty="0"/>
+              <a:t>AMAR WORLD</a:t>
+            </a:r>
+            <a:endParaRPr lang="zh-CN" altLang="en-US" dirty="0"/>
+          </a:p>
+        </p:txBody>
+      </p:sp>
+      <p:sp>
+        <p:nvSpPr>
+          <p:cNvPr id="66" name="椭圆 65">
+            <a:extLst>
+              <a:ext uri="{FF2B5EF4-FFF2-40B4-BE49-F238E27FC236}">
+                <a16:creationId xmlns:a16="http://schemas.microsoft.com/office/drawing/2014/main" id="{91FF571D-A82E-A345-2CD6-61B33F45B558}"/>
+              </a:ext>
+            </a:extLst>
+          </p:cNvPr>
+          <p:cNvSpPr/>
+          <p:nvPr/>
+        </p:nvSpPr>
+        <p:spPr>
+          <a:xfrm>
+            <a:off x="11146596" y="1206394"/>
+            <a:ext cx="165100" cy="177800"/>
+          </a:xfrm>
+          <a:prstGeom prst="ellipse">
+            <a:avLst/>
+          </a:prstGeom>
+        </p:spPr>
+        <p:style>
+          <a:lnRef idx="2">
+            <a:schemeClr val="accent2">
+              <a:shade val="15000"/>
+            </a:schemeClr>
+          </a:lnRef>
+          <a:fillRef idx="1">
+            <a:schemeClr val="accent2"/>
+          </a:fillRef>
+          <a:effectRef idx="0">
+            <a:schemeClr val="accent2"/>
+          </a:effectRef>
+          <a:fontRef idx="minor">
+            <a:schemeClr val="lt1"/>
+          </a:fontRef>
+        </p:style>
+        <p:txBody>
+          <a:bodyPr rtlCol="0" anchor="ctr"/>
+          <a:lstStyle/>
+          <a:p>
+            <a:pPr algn="ctr"/>
+            <a:endParaRPr lang="zh-CN" altLang="en-US"/>
+          </a:p>
+        </p:txBody>
+      </p:sp>
+      <p:sp>
+        <p:nvSpPr>
+          <p:cNvPr id="67" name="箭头: 右 66">
+            <a:extLst>
+              <a:ext uri="{FF2B5EF4-FFF2-40B4-BE49-F238E27FC236}">
+                <a16:creationId xmlns:a16="http://schemas.microsoft.com/office/drawing/2014/main" id="{1AAC0EBF-B5EE-90C9-23A8-F154B4C463E8}"/>
+              </a:ext>
+            </a:extLst>
+          </p:cNvPr>
+          <p:cNvSpPr/>
+          <p:nvPr/>
+        </p:nvSpPr>
+        <p:spPr>
+          <a:xfrm rot="2036059">
+            <a:off x="4444088" y="4711131"/>
+            <a:ext cx="1928719" cy="123305"/>
+          </a:xfrm>
+          <a:prstGeom prst="rightArrow">
+            <a:avLst/>
+          </a:prstGeom>
+        </p:spPr>
+        <p:style>
+          <a:lnRef idx="2">
+            <a:schemeClr val="accent1">
+              <a:shade val="15000"/>
+            </a:schemeClr>
+          </a:lnRef>
+          <a:fillRef idx="1">
+            <a:schemeClr val="accent1"/>
+          </a:fillRef>
+          <a:effectRef idx="0">
+            <a:schemeClr val="accent1"/>
+          </a:effectRef>
+          <a:fontRef idx="minor">
+            <a:schemeClr val="lt1"/>
+          </a:fontRef>
+        </p:style>
+        <p:txBody>
+          <a:bodyPr rtlCol="0" anchor="ctr"/>
+          <a:lstStyle/>
+          <a:p>
+            <a:pPr algn="ctr"/>
+            <a:endParaRPr lang="zh-CN" altLang="en-US"/>
+          </a:p>
+        </p:txBody>
+      </p:sp>
+      <p:sp>
+        <p:nvSpPr>
+          <p:cNvPr id="68" name="箭头: 右 67">
+            <a:extLst>
+              <a:ext uri="{FF2B5EF4-FFF2-40B4-BE49-F238E27FC236}">
+                <a16:creationId xmlns:a16="http://schemas.microsoft.com/office/drawing/2014/main" id="{B53A8CC6-455A-49B3-EEAA-4547947B409E}"/>
+              </a:ext>
+            </a:extLst>
+          </p:cNvPr>
+          <p:cNvSpPr/>
+          <p:nvPr/>
+        </p:nvSpPr>
+        <p:spPr>
+          <a:xfrm rot="2805302">
+            <a:off x="4664654" y="2408131"/>
+            <a:ext cx="2010322" cy="94050"/>
+          </a:xfrm>
+          <a:prstGeom prst="rightArrow">
+            <a:avLst/>
+          </a:prstGeom>
+        </p:spPr>
+        <p:style>
+          <a:lnRef idx="2">
+            <a:schemeClr val="accent1">
+              <a:shade val="15000"/>
+            </a:schemeClr>
+          </a:lnRef>
+          <a:fillRef idx="1">
+            <a:schemeClr val="accent1"/>
+          </a:fillRef>
+          <a:effectRef idx="0">
+            <a:schemeClr val="accent1"/>
+          </a:effectRef>
+          <a:fontRef idx="minor">
+            <a:schemeClr val="lt1"/>
+          </a:fontRef>
+        </p:style>
+        <p:txBody>
+          <a:bodyPr rtlCol="0" anchor="ctr"/>
+          <a:lstStyle/>
+          <a:p>
+            <a:pPr algn="ctr"/>
+            <a:endParaRPr lang="zh-CN" altLang="en-US"/>
+          </a:p>
+        </p:txBody>
+      </p:sp>
+      <p:sp>
+        <p:nvSpPr>
+          <p:cNvPr id="23" name="箭头: 下 22">
+            <a:extLst>
+              <a:ext uri="{FF2B5EF4-FFF2-40B4-BE49-F238E27FC236}">
+                <a16:creationId xmlns:a16="http://schemas.microsoft.com/office/drawing/2014/main" id="{4F7D1D11-8F9D-80B6-8645-FCB0F675687E}"/>
+              </a:ext>
+            </a:extLst>
+          </p:cNvPr>
+          <p:cNvSpPr/>
+          <p:nvPr/>
+        </p:nvSpPr>
+        <p:spPr>
+          <a:xfrm rot="17326619">
+            <a:off x="4563259" y="1708044"/>
+            <a:ext cx="56344" cy="2998169"/>
+          </a:xfrm>
+          <a:prstGeom prst="downArrow">
+            <a:avLst/>
+          </a:prstGeom>
+        </p:spPr>
+        <p:style>
+          <a:lnRef idx="2">
+            <a:schemeClr val="accent1">
+              <a:shade val="15000"/>
+            </a:schemeClr>
+          </a:lnRef>
+          <a:fillRef idx="1">
+            <a:schemeClr val="accent1"/>
+          </a:fillRef>
+          <a:effectRef idx="0">
+            <a:schemeClr val="accent1"/>
+          </a:effectRef>
+          <a:fontRef idx="minor">
+            <a:schemeClr val="lt1"/>
+          </a:fontRef>
+        </p:style>
+        <p:txBody>
+          <a:bodyPr rtlCol="0" anchor="ctr"/>
+          <a:lstStyle/>
+          <a:p>
+            <a:pPr algn="ctr"/>
+            <a:endParaRPr lang="zh-CN" altLang="en-US"/>
           </a:p>
         </p:txBody>
       </p:sp>

--- a/docs/overview.pptx
+++ b/docs/overview.pptx
@@ -5186,7 +5186,7 @@
         </p:nvSpPr>
         <p:spPr>
           <a:xfrm>
-            <a:off x="5611841" y="502942"/>
+            <a:off x="5610760" y="558284"/>
             <a:ext cx="2737025" cy="5048228"/>
           </a:xfrm>
           <a:prstGeom prst="rect">
@@ -5268,7 +5268,7 @@
         </p:nvSpPr>
         <p:spPr>
           <a:xfrm>
-            <a:off x="4219161" y="3780494"/>
+            <a:off x="3436711" y="4471454"/>
             <a:ext cx="1604484" cy="552968"/>
           </a:xfrm>
           <a:prstGeom prst="rect">
@@ -5313,9 +5313,9 @@
           <p:nvPr/>
         </p:nvSpPr>
         <p:spPr>
-          <a:xfrm rot="2002163">
-            <a:off x="3215173" y="3686588"/>
-            <a:ext cx="1152525" cy="94422"/>
+          <a:xfrm rot="3387979">
+            <a:off x="2522053" y="3969231"/>
+            <a:ext cx="1480950" cy="104801"/>
           </a:xfrm>
           <a:prstGeom prst="rightArrow">
             <a:avLst/>
@@ -5360,7 +5360,7 @@
         </p:nvSpPr>
         <p:spPr>
           <a:xfrm>
-            <a:off x="4219157" y="3872312"/>
+            <a:off x="3412207" y="4575579"/>
             <a:ext cx="1729418" cy="369332"/>
           </a:xfrm>
           <a:prstGeom prst="rect">
@@ -5684,7 +5684,7 @@
         </p:nvSpPr>
         <p:spPr>
           <a:xfrm>
-            <a:off x="8137250" y="3101975"/>
+            <a:off x="8004022" y="4561514"/>
             <a:ext cx="165100" cy="177800"/>
           </a:xfrm>
           <a:prstGeom prst="ellipse">
@@ -5718,10 +5718,10 @@
       </p:sp>
       <p:sp>
         <p:nvSpPr>
-          <p:cNvPr id="57" name="文本框 56">
-            <a:extLst>
-              <a:ext uri="{FF2B5EF4-FFF2-40B4-BE49-F238E27FC236}">
-                <a16:creationId xmlns:a16="http://schemas.microsoft.com/office/drawing/2014/main" id="{B0104898-28DC-AACA-4AAD-10E7B0A39FC3}"/>
+          <p:cNvPr id="59" name="文本框 58">
+            <a:extLst>
+              <a:ext uri="{FF2B5EF4-FFF2-40B4-BE49-F238E27FC236}">
+                <a16:creationId xmlns:a16="http://schemas.microsoft.com/office/drawing/2014/main" id="{FFFDC12D-85AB-9D4D-9545-B52B2D7A92B1}"/>
               </a:ext>
             </a:extLst>
           </p:cNvPr>
@@ -5729,9 +5729,9 @@
           <p:nvPr/>
         </p:nvSpPr>
         <p:spPr>
-          <a:xfrm>
-            <a:off x="8119510" y="3064204"/>
-            <a:ext cx="126206" cy="276999"/>
+          <a:xfrm rot="2135733">
+            <a:off x="3502939" y="3728810"/>
+            <a:ext cx="2800350" cy="246262"/>
           </a:xfrm>
           <a:prstGeom prst="rect">
             <a:avLst/>
@@ -5745,19 +5745,19 @@
           <a:lstStyle/>
           <a:p>
             <a:r>
-              <a:rPr lang="en-US" altLang="zh-CN" sz="1200" dirty="0"/>
-              <a:t>3</a:t>
-            </a:r>
-            <a:endParaRPr lang="zh-CN" altLang="en-US" sz="1200" dirty="0"/>
-          </a:p>
-        </p:txBody>
-      </p:sp>
-      <p:sp>
-        <p:nvSpPr>
-          <p:cNvPr id="59" name="文本框 58">
-            <a:extLst>
-              <a:ext uri="{FF2B5EF4-FFF2-40B4-BE49-F238E27FC236}">
-                <a16:creationId xmlns:a16="http://schemas.microsoft.com/office/drawing/2014/main" id="{FFFDC12D-85AB-9D4D-9545-B52B2D7A92B1}"/>
+              <a:rPr lang="en-US" altLang="zh-CN" sz="1000" dirty="0"/>
+              <a:t>SKILLS, Or rather, a kind of standard</a:t>
+            </a:r>
+            <a:endParaRPr lang="zh-CN" altLang="en-US" sz="1000" dirty="0"/>
+          </a:p>
+        </p:txBody>
+      </p:sp>
+      <p:sp>
+        <p:nvSpPr>
+          <p:cNvPr id="57" name="文本框 56">
+            <a:extLst>
+              <a:ext uri="{FF2B5EF4-FFF2-40B4-BE49-F238E27FC236}">
+                <a16:creationId xmlns:a16="http://schemas.microsoft.com/office/drawing/2014/main" id="{B0104898-28DC-AACA-4AAD-10E7B0A39FC3}"/>
               </a:ext>
             </a:extLst>
           </p:cNvPr>
@@ -5765,9 +5765,9 @@
           <p:nvPr/>
         </p:nvSpPr>
         <p:spPr>
-          <a:xfrm rot="1143579">
-            <a:off x="3490096" y="3057217"/>
-            <a:ext cx="2800350" cy="246262"/>
+          <a:xfrm>
+            <a:off x="7976789" y="4512965"/>
+            <a:ext cx="126206" cy="276999"/>
           </a:xfrm>
           <a:prstGeom prst="rect">
             <a:avLst/>
@@ -5781,10 +5781,10 @@
           <a:lstStyle/>
           <a:p>
             <a:r>
-              <a:rPr lang="en-US" altLang="zh-CN" sz="1000" dirty="0"/>
-              <a:t>SKILLS, Or rather, a kind of standard</a:t>
-            </a:r>
-            <a:endParaRPr lang="zh-CN" altLang="en-US" sz="1000" dirty="0"/>
+              <a:rPr lang="en-US" altLang="zh-CN" sz="1200" dirty="0"/>
+              <a:t>3</a:t>
+            </a:r>
+            <a:endParaRPr lang="zh-CN" altLang="en-US" sz="1200" dirty="0"/>
           </a:p>
         </p:txBody>
       </p:sp>
@@ -5990,10 +5990,10 @@
       </p:sp>
       <p:sp>
         <p:nvSpPr>
-          <p:cNvPr id="67" name="箭头: 右 66">
-            <a:extLst>
-              <a:ext uri="{FF2B5EF4-FFF2-40B4-BE49-F238E27FC236}">
-                <a16:creationId xmlns:a16="http://schemas.microsoft.com/office/drawing/2014/main" id="{1AAC0EBF-B5EE-90C9-23A8-F154B4C463E8}"/>
+          <p:cNvPr id="23" name="箭头: 下 22">
+            <a:extLst>
+              <a:ext uri="{FF2B5EF4-FFF2-40B4-BE49-F238E27FC236}">
+                <a16:creationId xmlns:a16="http://schemas.microsoft.com/office/drawing/2014/main" id="{4F7D1D11-8F9D-80B6-8645-FCB0F675687E}"/>
               </a:ext>
             </a:extLst>
           </p:cNvPr>
@@ -6001,11 +6001,11 @@
           <p:nvPr/>
         </p:nvSpPr>
         <p:spPr>
-          <a:xfrm rot="2036059">
-            <a:off x="4444088" y="4711131"/>
-            <a:ext cx="1928719" cy="123305"/>
-          </a:xfrm>
-          <a:prstGeom prst="rightArrow">
+          <a:xfrm rot="18322881">
+            <a:off x="4537787" y="1914341"/>
+            <a:ext cx="65706" cy="3652592"/>
+          </a:xfrm>
+          <a:prstGeom prst="downArrow">
             <a:avLst/>
           </a:prstGeom>
         </p:spPr>
@@ -6036,10 +6036,10 @@
       </p:sp>
       <p:sp>
         <p:nvSpPr>
-          <p:cNvPr id="68" name="箭头: 右 67">
-            <a:extLst>
-              <a:ext uri="{FF2B5EF4-FFF2-40B4-BE49-F238E27FC236}">
-                <a16:creationId xmlns:a16="http://schemas.microsoft.com/office/drawing/2014/main" id="{B53A8CC6-455A-49B3-EEAA-4547947B409E}"/>
+          <p:cNvPr id="67" name="箭头: 右 66">
+            <a:extLst>
+              <a:ext uri="{FF2B5EF4-FFF2-40B4-BE49-F238E27FC236}">
+                <a16:creationId xmlns:a16="http://schemas.microsoft.com/office/drawing/2014/main" id="{1AAC0EBF-B5EE-90C9-23A8-F154B4C463E8}"/>
               </a:ext>
             </a:extLst>
           </p:cNvPr>
@@ -6047,9 +6047,9 @@
           <p:nvPr/>
         </p:nvSpPr>
         <p:spPr>
-          <a:xfrm rot="2805302">
-            <a:off x="4664654" y="2408131"/>
-            <a:ext cx="2010322" cy="94050"/>
+          <a:xfrm rot="1033216">
+            <a:off x="4784492" y="5102124"/>
+            <a:ext cx="1483561" cy="144424"/>
           </a:xfrm>
           <a:prstGeom prst="rightArrow">
             <a:avLst/>
@@ -6082,10 +6082,10 @@
       </p:sp>
       <p:sp>
         <p:nvSpPr>
-          <p:cNvPr id="23" name="箭头: 下 22">
-            <a:extLst>
-              <a:ext uri="{FF2B5EF4-FFF2-40B4-BE49-F238E27FC236}">
-                <a16:creationId xmlns:a16="http://schemas.microsoft.com/office/drawing/2014/main" id="{4F7D1D11-8F9D-80B6-8645-FCB0F675687E}"/>
+          <p:cNvPr id="68" name="箭头: 右 67">
+            <a:extLst>
+              <a:ext uri="{FF2B5EF4-FFF2-40B4-BE49-F238E27FC236}">
+                <a16:creationId xmlns:a16="http://schemas.microsoft.com/office/drawing/2014/main" id="{B53A8CC6-455A-49B3-EEAA-4547947B409E}"/>
               </a:ext>
             </a:extLst>
           </p:cNvPr>
@@ -6093,11 +6093,57 @@
           <p:nvPr/>
         </p:nvSpPr>
         <p:spPr>
-          <a:xfrm rot="17326619">
-            <a:off x="4563259" y="1708044"/>
-            <a:ext cx="56344" cy="2998169"/>
-          </a:xfrm>
-          <a:prstGeom prst="downArrow">
+          <a:xfrm rot="3389305" flipV="1">
+            <a:off x="3481763" y="3198494"/>
+            <a:ext cx="3545715" cy="139763"/>
+          </a:xfrm>
+          <a:prstGeom prst="rightArrow">
+            <a:avLst/>
+          </a:prstGeom>
+        </p:spPr>
+        <p:style>
+          <a:lnRef idx="2">
+            <a:schemeClr val="accent3">
+              <a:shade val="15000"/>
+            </a:schemeClr>
+          </a:lnRef>
+          <a:fillRef idx="1">
+            <a:schemeClr val="accent3"/>
+          </a:fillRef>
+          <a:effectRef idx="0">
+            <a:schemeClr val="accent3"/>
+          </a:effectRef>
+          <a:fontRef idx="minor">
+            <a:schemeClr val="lt1"/>
+          </a:fontRef>
+        </p:style>
+        <p:txBody>
+          <a:bodyPr rtlCol="0" anchor="ctr"/>
+          <a:lstStyle/>
+          <a:p>
+            <a:pPr algn="ctr"/>
+            <a:endParaRPr lang="zh-CN" altLang="en-US" dirty="0"/>
+          </a:p>
+        </p:txBody>
+      </p:sp>
+      <p:sp>
+        <p:nvSpPr>
+          <p:cNvPr id="41" name="矩形 40">
+            <a:extLst>
+              <a:ext uri="{FF2B5EF4-FFF2-40B4-BE49-F238E27FC236}">
+                <a16:creationId xmlns:a16="http://schemas.microsoft.com/office/drawing/2014/main" id="{E593706C-6739-ABAB-6769-0B8812CB2B71}"/>
+              </a:ext>
+            </a:extLst>
+          </p:cNvPr>
+          <p:cNvSpPr/>
+          <p:nvPr/>
+        </p:nvSpPr>
+        <p:spPr>
+          <a:xfrm>
+            <a:off x="5891150" y="3142862"/>
+            <a:ext cx="2318603" cy="773430"/>
+          </a:xfrm>
+          <a:prstGeom prst="rect">
             <a:avLst/>
           </a:prstGeom>
         </p:spPr>
@@ -6115,6 +6161,608 @@
           </a:effectRef>
           <a:fontRef idx="minor">
             <a:schemeClr val="lt1"/>
+          </a:fontRef>
+        </p:style>
+        <p:txBody>
+          <a:bodyPr rtlCol="0" anchor="ctr"/>
+          <a:lstStyle/>
+          <a:p>
+            <a:pPr algn="ctr"/>
+            <a:endParaRPr lang="zh-CN" altLang="en-US"/>
+          </a:p>
+        </p:txBody>
+      </p:sp>
+      <p:sp>
+        <p:nvSpPr>
+          <p:cNvPr id="46" name="箭头: 下 45">
+            <a:extLst>
+              <a:ext uri="{FF2B5EF4-FFF2-40B4-BE49-F238E27FC236}">
+                <a16:creationId xmlns:a16="http://schemas.microsoft.com/office/drawing/2014/main" id="{34FB12DA-509A-40D4-9871-CF55B5D22465}"/>
+              </a:ext>
+            </a:extLst>
+          </p:cNvPr>
+          <p:cNvSpPr/>
+          <p:nvPr/>
+        </p:nvSpPr>
+        <p:spPr>
+          <a:xfrm rot="10800000">
+            <a:off x="6663690" y="3981450"/>
+            <a:ext cx="842851" cy="454673"/>
+          </a:xfrm>
+          <a:prstGeom prst="downArrow">
+            <a:avLst/>
+          </a:prstGeom>
+        </p:spPr>
+        <p:style>
+          <a:lnRef idx="2">
+            <a:schemeClr val="accent6">
+              <a:shade val="15000"/>
+            </a:schemeClr>
+          </a:lnRef>
+          <a:fillRef idx="1">
+            <a:schemeClr val="accent6"/>
+          </a:fillRef>
+          <a:effectRef idx="0">
+            <a:schemeClr val="accent6"/>
+          </a:effectRef>
+          <a:fontRef idx="minor">
+            <a:schemeClr val="lt1"/>
+          </a:fontRef>
+        </p:style>
+        <p:txBody>
+          <a:bodyPr rtlCol="0" anchor="ctr"/>
+          <a:lstStyle/>
+          <a:p>
+            <a:pPr algn="ctr"/>
+            <a:endParaRPr lang="zh-CN" altLang="en-US"/>
+          </a:p>
+        </p:txBody>
+      </p:sp>
+      <p:sp>
+        <p:nvSpPr>
+          <p:cNvPr id="47" name="文本框 46">
+            <a:extLst>
+              <a:ext uri="{FF2B5EF4-FFF2-40B4-BE49-F238E27FC236}">
+                <a16:creationId xmlns:a16="http://schemas.microsoft.com/office/drawing/2014/main" id="{7568D3FC-8C82-1D80-EB73-EC98129BF820}"/>
+              </a:ext>
+            </a:extLst>
+          </p:cNvPr>
+          <p:cNvSpPr txBox="1"/>
+          <p:nvPr/>
+        </p:nvSpPr>
+        <p:spPr>
+          <a:xfrm>
+            <a:off x="6368307" y="3344911"/>
+            <a:ext cx="1979478" cy="369332"/>
+          </a:xfrm>
+          <a:prstGeom prst="rect">
+            <a:avLst/>
+          </a:prstGeom>
+          <a:noFill/>
+        </p:spPr>
+        <p:txBody>
+          <a:bodyPr wrap="square" rtlCol="0">
+            <a:spAutoFit/>
+          </a:bodyPr>
+          <a:lstStyle/>
+          <a:p>
+            <a:r>
+              <a:rPr lang="zh-CN" altLang="en-US" dirty="0"/>
+              <a:t>分配元类</a:t>
+            </a:r>
+          </a:p>
+        </p:txBody>
+      </p:sp>
+      <p:sp>
+        <p:nvSpPr>
+          <p:cNvPr id="50" name="矩形 49">
+            <a:extLst>
+              <a:ext uri="{FF2B5EF4-FFF2-40B4-BE49-F238E27FC236}">
+                <a16:creationId xmlns:a16="http://schemas.microsoft.com/office/drawing/2014/main" id="{04A8AC55-15E7-0AD6-2A4C-34CAA155B5AA}"/>
+              </a:ext>
+            </a:extLst>
+          </p:cNvPr>
+          <p:cNvSpPr/>
+          <p:nvPr/>
+        </p:nvSpPr>
+        <p:spPr>
+          <a:xfrm>
+            <a:off x="5880445" y="1982778"/>
+            <a:ext cx="2384170" cy="723577"/>
+          </a:xfrm>
+          <a:prstGeom prst="rect">
+            <a:avLst/>
+          </a:prstGeom>
+        </p:spPr>
+        <p:style>
+          <a:lnRef idx="2">
+            <a:schemeClr val="accent1">
+              <a:shade val="15000"/>
+            </a:schemeClr>
+          </a:lnRef>
+          <a:fillRef idx="1">
+            <a:schemeClr val="accent1"/>
+          </a:fillRef>
+          <a:effectRef idx="0">
+            <a:schemeClr val="accent1"/>
+          </a:effectRef>
+          <a:fontRef idx="minor">
+            <a:schemeClr val="lt1"/>
+          </a:fontRef>
+        </p:style>
+        <p:txBody>
+          <a:bodyPr rtlCol="0" anchor="ctr"/>
+          <a:lstStyle/>
+          <a:p>
+            <a:pPr algn="ctr"/>
+            <a:endParaRPr lang="zh-CN" altLang="en-US"/>
+          </a:p>
+        </p:txBody>
+      </p:sp>
+      <p:sp>
+        <p:nvSpPr>
+          <p:cNvPr id="51" name="箭头: 下 50">
+            <a:extLst>
+              <a:ext uri="{FF2B5EF4-FFF2-40B4-BE49-F238E27FC236}">
+                <a16:creationId xmlns:a16="http://schemas.microsoft.com/office/drawing/2014/main" id="{3BE3E1B4-1152-F8FA-213D-AA5F3BFDA3EC}"/>
+              </a:ext>
+            </a:extLst>
+          </p:cNvPr>
+          <p:cNvSpPr/>
+          <p:nvPr/>
+        </p:nvSpPr>
+        <p:spPr>
+          <a:xfrm rot="10800000">
+            <a:off x="6603325" y="2749480"/>
+            <a:ext cx="837623" cy="339846"/>
+          </a:xfrm>
+          <a:prstGeom prst="downArrow">
+            <a:avLst/>
+          </a:prstGeom>
+        </p:spPr>
+        <p:style>
+          <a:lnRef idx="2">
+            <a:schemeClr val="accent6">
+              <a:shade val="15000"/>
+            </a:schemeClr>
+          </a:lnRef>
+          <a:fillRef idx="1">
+            <a:schemeClr val="accent6"/>
+          </a:fillRef>
+          <a:effectRef idx="0">
+            <a:schemeClr val="accent6"/>
+          </a:effectRef>
+          <a:fontRef idx="minor">
+            <a:schemeClr val="lt1"/>
+          </a:fontRef>
+        </p:style>
+        <p:txBody>
+          <a:bodyPr rtlCol="0" anchor="ctr"/>
+          <a:lstStyle/>
+          <a:p>
+            <a:pPr algn="ctr"/>
+            <a:endParaRPr lang="zh-CN" altLang="en-US"/>
+          </a:p>
+        </p:txBody>
+      </p:sp>
+      <p:sp>
+        <p:nvSpPr>
+          <p:cNvPr id="52" name="文本框 51">
+            <a:extLst>
+              <a:ext uri="{FF2B5EF4-FFF2-40B4-BE49-F238E27FC236}">
+                <a16:creationId xmlns:a16="http://schemas.microsoft.com/office/drawing/2014/main" id="{41658801-D7BD-55B7-2474-8D0BEF5FEF16}"/>
+              </a:ext>
+            </a:extLst>
+          </p:cNvPr>
+          <p:cNvSpPr txBox="1"/>
+          <p:nvPr/>
+        </p:nvSpPr>
+        <p:spPr>
+          <a:xfrm>
+            <a:off x="6078672" y="2176113"/>
+            <a:ext cx="2247103" cy="369332"/>
+          </a:xfrm>
+          <a:prstGeom prst="rect">
+            <a:avLst/>
+          </a:prstGeom>
+          <a:noFill/>
+        </p:spPr>
+        <p:txBody>
+          <a:bodyPr wrap="square" rtlCol="0">
+            <a:spAutoFit/>
+          </a:bodyPr>
+          <a:lstStyle/>
+          <a:p>
+            <a:r>
+              <a:rPr lang="en-US" altLang="zh-CN" dirty="0"/>
+              <a:t>Parameter Layer</a:t>
+            </a:r>
+            <a:endParaRPr lang="zh-CN" altLang="en-US" dirty="0"/>
+          </a:p>
+        </p:txBody>
+      </p:sp>
+      <p:sp>
+        <p:nvSpPr>
+          <p:cNvPr id="63" name="椭圆 62">
+            <a:extLst>
+              <a:ext uri="{FF2B5EF4-FFF2-40B4-BE49-F238E27FC236}">
+                <a16:creationId xmlns:a16="http://schemas.microsoft.com/office/drawing/2014/main" id="{30ED689D-CFD0-5C86-3742-42F3C9605899}"/>
+              </a:ext>
+            </a:extLst>
+          </p:cNvPr>
+          <p:cNvSpPr/>
+          <p:nvPr/>
+        </p:nvSpPr>
+        <p:spPr>
+          <a:xfrm>
+            <a:off x="8030138" y="2044088"/>
+            <a:ext cx="165100" cy="177800"/>
+          </a:xfrm>
+          <a:prstGeom prst="ellipse">
+            <a:avLst/>
+          </a:prstGeom>
+        </p:spPr>
+        <p:style>
+          <a:lnRef idx="2">
+            <a:schemeClr val="accent2">
+              <a:shade val="15000"/>
+            </a:schemeClr>
+          </a:lnRef>
+          <a:fillRef idx="1">
+            <a:schemeClr val="accent2"/>
+          </a:fillRef>
+          <a:effectRef idx="0">
+            <a:schemeClr val="accent2"/>
+          </a:effectRef>
+          <a:fontRef idx="minor">
+            <a:schemeClr val="lt1"/>
+          </a:fontRef>
+        </p:style>
+        <p:txBody>
+          <a:bodyPr rtlCol="0" anchor="ctr"/>
+          <a:lstStyle/>
+          <a:p>
+            <a:pPr algn="ctr"/>
+            <a:endParaRPr lang="zh-CN" altLang="en-US"/>
+          </a:p>
+        </p:txBody>
+      </p:sp>
+      <p:sp>
+        <p:nvSpPr>
+          <p:cNvPr id="69" name="椭圆 68">
+            <a:extLst>
+              <a:ext uri="{FF2B5EF4-FFF2-40B4-BE49-F238E27FC236}">
+                <a16:creationId xmlns:a16="http://schemas.microsoft.com/office/drawing/2014/main" id="{7C41404F-074F-EFA6-6F99-23FE4C2D4586}"/>
+              </a:ext>
+            </a:extLst>
+          </p:cNvPr>
+          <p:cNvSpPr/>
+          <p:nvPr/>
+        </p:nvSpPr>
+        <p:spPr>
+          <a:xfrm>
+            <a:off x="8011285" y="3197652"/>
+            <a:ext cx="165100" cy="177800"/>
+          </a:xfrm>
+          <a:prstGeom prst="ellipse">
+            <a:avLst/>
+          </a:prstGeom>
+        </p:spPr>
+        <p:style>
+          <a:lnRef idx="2">
+            <a:schemeClr val="accent2">
+              <a:shade val="15000"/>
+            </a:schemeClr>
+          </a:lnRef>
+          <a:fillRef idx="1">
+            <a:schemeClr val="accent2"/>
+          </a:fillRef>
+          <a:effectRef idx="0">
+            <a:schemeClr val="accent2"/>
+          </a:effectRef>
+          <a:fontRef idx="minor">
+            <a:schemeClr val="lt1"/>
+          </a:fontRef>
+        </p:style>
+        <p:txBody>
+          <a:bodyPr rtlCol="0" anchor="ctr"/>
+          <a:lstStyle>
+            <a:defPPr>
+              <a:defRPr lang="zh-CN"/>
+            </a:defPPr>
+            <a:lvl1pPr marL="0" algn="l" defTabSz="914400" rtl="0" eaLnBrk="1" latinLnBrk="0" hangingPunct="1">
+              <a:defRPr sz="1800" kern="1200">
+                <a:solidFill>
+                  <a:schemeClr val="lt1"/>
+                </a:solidFill>
+                <a:latin typeface="+mn-lt"/>
+                <a:ea typeface="+mn-ea"/>
+                <a:cs typeface="+mn-cs"/>
+              </a:defRPr>
+            </a:lvl1pPr>
+            <a:lvl2pPr marL="457200" algn="l" defTabSz="914400" rtl="0" eaLnBrk="1" latinLnBrk="0" hangingPunct="1">
+              <a:defRPr sz="1800" kern="1200">
+                <a:solidFill>
+                  <a:schemeClr val="lt1"/>
+                </a:solidFill>
+                <a:latin typeface="+mn-lt"/>
+                <a:ea typeface="+mn-ea"/>
+                <a:cs typeface="+mn-cs"/>
+              </a:defRPr>
+            </a:lvl2pPr>
+            <a:lvl3pPr marL="914400" algn="l" defTabSz="914400" rtl="0" eaLnBrk="1" latinLnBrk="0" hangingPunct="1">
+              <a:defRPr sz="1800" kern="1200">
+                <a:solidFill>
+                  <a:schemeClr val="lt1"/>
+                </a:solidFill>
+                <a:latin typeface="+mn-lt"/>
+                <a:ea typeface="+mn-ea"/>
+                <a:cs typeface="+mn-cs"/>
+              </a:defRPr>
+            </a:lvl3pPr>
+            <a:lvl4pPr marL="1371600" algn="l" defTabSz="914400" rtl="0" eaLnBrk="1" latinLnBrk="0" hangingPunct="1">
+              <a:defRPr sz="1800" kern="1200">
+                <a:solidFill>
+                  <a:schemeClr val="lt1"/>
+                </a:solidFill>
+                <a:latin typeface="+mn-lt"/>
+                <a:ea typeface="+mn-ea"/>
+                <a:cs typeface="+mn-cs"/>
+              </a:defRPr>
+            </a:lvl4pPr>
+            <a:lvl5pPr marL="1828800" algn="l" defTabSz="914400" rtl="0" eaLnBrk="1" latinLnBrk="0" hangingPunct="1">
+              <a:defRPr sz="1800" kern="1200">
+                <a:solidFill>
+                  <a:schemeClr val="lt1"/>
+                </a:solidFill>
+                <a:latin typeface="+mn-lt"/>
+                <a:ea typeface="+mn-ea"/>
+                <a:cs typeface="+mn-cs"/>
+              </a:defRPr>
+            </a:lvl5pPr>
+            <a:lvl6pPr marL="2286000" algn="l" defTabSz="914400" rtl="0" eaLnBrk="1" latinLnBrk="0" hangingPunct="1">
+              <a:defRPr sz="1800" kern="1200">
+                <a:solidFill>
+                  <a:schemeClr val="lt1"/>
+                </a:solidFill>
+                <a:latin typeface="+mn-lt"/>
+                <a:ea typeface="+mn-ea"/>
+                <a:cs typeface="+mn-cs"/>
+              </a:defRPr>
+            </a:lvl6pPr>
+            <a:lvl7pPr marL="2743200" algn="l" defTabSz="914400" rtl="0" eaLnBrk="1" latinLnBrk="0" hangingPunct="1">
+              <a:defRPr sz="1800" kern="1200">
+                <a:solidFill>
+                  <a:schemeClr val="lt1"/>
+                </a:solidFill>
+                <a:latin typeface="+mn-lt"/>
+                <a:ea typeface="+mn-ea"/>
+                <a:cs typeface="+mn-cs"/>
+              </a:defRPr>
+            </a:lvl7pPr>
+            <a:lvl8pPr marL="3200400" algn="l" defTabSz="914400" rtl="0" eaLnBrk="1" latinLnBrk="0" hangingPunct="1">
+              <a:defRPr sz="1800" kern="1200">
+                <a:solidFill>
+                  <a:schemeClr val="lt1"/>
+                </a:solidFill>
+                <a:latin typeface="+mn-lt"/>
+                <a:ea typeface="+mn-ea"/>
+                <a:cs typeface="+mn-cs"/>
+              </a:defRPr>
+            </a:lvl8pPr>
+            <a:lvl9pPr marL="3657600" algn="l" defTabSz="914400" rtl="0" eaLnBrk="1" latinLnBrk="0" hangingPunct="1">
+              <a:defRPr sz="1800" kern="1200">
+                <a:solidFill>
+                  <a:schemeClr val="lt1"/>
+                </a:solidFill>
+                <a:latin typeface="+mn-lt"/>
+                <a:ea typeface="+mn-ea"/>
+                <a:cs typeface="+mn-cs"/>
+              </a:defRPr>
+            </a:lvl9pPr>
+          </a:lstStyle>
+          <a:p>
+            <a:pPr algn="ctr"/>
+            <a:endParaRPr lang="zh-CN" altLang="en-US"/>
+          </a:p>
+        </p:txBody>
+      </p:sp>
+      <p:sp>
+        <p:nvSpPr>
+          <p:cNvPr id="71" name="文本框 70">
+            <a:extLst>
+              <a:ext uri="{FF2B5EF4-FFF2-40B4-BE49-F238E27FC236}">
+                <a16:creationId xmlns:a16="http://schemas.microsoft.com/office/drawing/2014/main" id="{937F8CD2-EC51-1E78-10BC-7C12FA3BA907}"/>
+              </a:ext>
+            </a:extLst>
+          </p:cNvPr>
+          <p:cNvSpPr txBox="1"/>
+          <p:nvPr/>
+        </p:nvSpPr>
+        <p:spPr>
+          <a:xfrm>
+            <a:off x="7969472" y="3148052"/>
+            <a:ext cx="183953" cy="276999"/>
+          </a:xfrm>
+          <a:prstGeom prst="rect">
+            <a:avLst/>
+          </a:prstGeom>
+          <a:noFill/>
+        </p:spPr>
+        <p:txBody>
+          <a:bodyPr wrap="square" rtlCol="0">
+            <a:spAutoFit/>
+          </a:bodyPr>
+          <a:lstStyle/>
+          <a:p>
+            <a:r>
+              <a:rPr lang="en-US" altLang="zh-CN" sz="1200" dirty="0"/>
+              <a:t>4</a:t>
+            </a:r>
+            <a:endParaRPr lang="zh-CN" altLang="en-US" sz="1200" dirty="0"/>
+          </a:p>
+        </p:txBody>
+      </p:sp>
+      <p:sp>
+        <p:nvSpPr>
+          <p:cNvPr id="72" name="文本框 71">
+            <a:extLst>
+              <a:ext uri="{FF2B5EF4-FFF2-40B4-BE49-F238E27FC236}">
+                <a16:creationId xmlns:a16="http://schemas.microsoft.com/office/drawing/2014/main" id="{8ADCD6E6-4DD3-A42E-FC8F-06650FA5531D}"/>
+              </a:ext>
+            </a:extLst>
+          </p:cNvPr>
+          <p:cNvSpPr txBox="1"/>
+          <p:nvPr/>
+        </p:nvSpPr>
+        <p:spPr>
+          <a:xfrm>
+            <a:off x="8013231" y="1986044"/>
+            <a:ext cx="136493" cy="276999"/>
+          </a:xfrm>
+          <a:prstGeom prst="rect">
+            <a:avLst/>
+          </a:prstGeom>
+          <a:noFill/>
+        </p:spPr>
+        <p:txBody>
+          <a:bodyPr wrap="square" rtlCol="0">
+            <a:spAutoFit/>
+          </a:bodyPr>
+          <a:lstStyle/>
+          <a:p>
+            <a:r>
+              <a:rPr lang="en-US" altLang="zh-CN" sz="1200" dirty="0"/>
+              <a:t>5</a:t>
+            </a:r>
+            <a:endParaRPr lang="zh-CN" altLang="en-US" sz="1200" dirty="0"/>
+          </a:p>
+        </p:txBody>
+      </p:sp>
+      <p:sp>
+        <p:nvSpPr>
+          <p:cNvPr id="74" name="矩形 73">
+            <a:extLst>
+              <a:ext uri="{FF2B5EF4-FFF2-40B4-BE49-F238E27FC236}">
+                <a16:creationId xmlns:a16="http://schemas.microsoft.com/office/drawing/2014/main" id="{C373CE95-D959-746B-A204-226380DEDD0D}"/>
+              </a:ext>
+            </a:extLst>
+          </p:cNvPr>
+          <p:cNvSpPr/>
+          <p:nvPr/>
+        </p:nvSpPr>
+        <p:spPr>
+          <a:xfrm>
+            <a:off x="2571750" y="5198169"/>
+            <a:ext cx="2731294" cy="613025"/>
+          </a:xfrm>
+          <a:prstGeom prst="rect">
+            <a:avLst/>
+          </a:prstGeom>
+        </p:spPr>
+        <p:style>
+          <a:lnRef idx="2">
+            <a:schemeClr val="accent4"/>
+          </a:lnRef>
+          <a:fillRef idx="1">
+            <a:schemeClr val="lt1"/>
+          </a:fillRef>
+          <a:effectRef idx="0">
+            <a:schemeClr val="accent4"/>
+          </a:effectRef>
+          <a:fontRef idx="minor">
+            <a:schemeClr val="dk1"/>
+          </a:fontRef>
+        </p:style>
+        <p:txBody>
+          <a:bodyPr rtlCol="0" anchor="ctr"/>
+          <a:lstStyle/>
+          <a:p>
+            <a:pPr algn="ctr"/>
+            <a:endParaRPr lang="zh-CN" altLang="en-US"/>
+          </a:p>
+        </p:txBody>
+      </p:sp>
+      <p:sp>
+        <p:nvSpPr>
+          <p:cNvPr id="73" name="文本框 72">
+            <a:extLst>
+              <a:ext uri="{FF2B5EF4-FFF2-40B4-BE49-F238E27FC236}">
+                <a16:creationId xmlns:a16="http://schemas.microsoft.com/office/drawing/2014/main" id="{5F194D1A-7042-EE1E-02A6-D6004849EA36}"/>
+              </a:ext>
+            </a:extLst>
+          </p:cNvPr>
+          <p:cNvSpPr txBox="1"/>
+          <p:nvPr/>
+        </p:nvSpPr>
+        <p:spPr>
+          <a:xfrm>
+            <a:off x="2571750" y="5198169"/>
+            <a:ext cx="2731294" cy="369332"/>
+          </a:xfrm>
+          <a:prstGeom prst="rect">
+            <a:avLst/>
+          </a:prstGeom>
+          <a:noFill/>
+        </p:spPr>
+        <p:txBody>
+          <a:bodyPr wrap="square" rtlCol="0">
+            <a:spAutoFit/>
+          </a:bodyPr>
+          <a:lstStyle/>
+          <a:p>
+            <a:r>
+              <a:rPr lang="en-US" altLang="zh-CN" dirty="0"/>
+              <a:t>4.mataclass</a:t>
+            </a:r>
+            <a:r>
+              <a:rPr lang="zh-CN" altLang="en-US" dirty="0"/>
+              <a:t>是</a:t>
+            </a:r>
+            <a:r>
+              <a:rPr lang="en-US" altLang="zh-CN" dirty="0"/>
+              <a:t>AME</a:t>
+            </a:r>
+            <a:r>
+              <a:rPr lang="zh-CN" altLang="en-US" dirty="0"/>
+              <a:t>的基石</a:t>
+            </a:r>
+          </a:p>
+        </p:txBody>
+      </p:sp>
+      <p:sp>
+        <p:nvSpPr>
+          <p:cNvPr id="76" name="矩形 75">
+            <a:extLst>
+              <a:ext uri="{FF2B5EF4-FFF2-40B4-BE49-F238E27FC236}">
+                <a16:creationId xmlns:a16="http://schemas.microsoft.com/office/drawing/2014/main" id="{01576ACD-394C-E837-AB44-FDD2ED9C85D9}"/>
+              </a:ext>
+            </a:extLst>
+          </p:cNvPr>
+          <p:cNvSpPr/>
+          <p:nvPr/>
+        </p:nvSpPr>
+        <p:spPr>
+          <a:xfrm>
+            <a:off x="2918957" y="5883965"/>
+            <a:ext cx="3058933" cy="850559"/>
+          </a:xfrm>
+          <a:prstGeom prst="rect">
+            <a:avLst/>
+          </a:prstGeom>
+        </p:spPr>
+        <p:style>
+          <a:lnRef idx="2">
+            <a:schemeClr val="accent4"/>
+          </a:lnRef>
+          <a:fillRef idx="1">
+            <a:schemeClr val="lt1"/>
+          </a:fillRef>
+          <a:effectRef idx="0">
+            <a:schemeClr val="accent4"/>
+          </a:effectRef>
+          <a:fontRef idx="minor">
+            <a:schemeClr val="dk1"/>
           </a:fontRef>
         </p:style>
         <p:txBody>

--- a/docs/overview.pptx
+++ b/docs/overview.pptx
@@ -4742,7 +4742,7 @@
         </p:nvSpPr>
         <p:spPr>
           <a:xfrm>
-            <a:off x="9833605" y="4086765"/>
+            <a:off x="9890712" y="4066792"/>
             <a:ext cx="1824990" cy="369332"/>
           </a:xfrm>
           <a:prstGeom prst="rect">
@@ -6744,7 +6744,7 @@
         </p:nvSpPr>
         <p:spPr>
           <a:xfrm>
-            <a:off x="2918957" y="5883965"/>
+            <a:off x="3014845" y="5897094"/>
             <a:ext cx="3058933" cy="850559"/>
           </a:xfrm>
           <a:prstGeom prst="rect">
@@ -6768,6 +6768,316 @@
         <p:txBody>
           <a:bodyPr rtlCol="0" anchor="ctr"/>
           <a:lstStyle/>
+          <a:p>
+            <a:pPr algn="ctr"/>
+            <a:endParaRPr lang="zh-CN" altLang="en-US" dirty="0"/>
+          </a:p>
+        </p:txBody>
+      </p:sp>
+      <p:sp>
+        <p:nvSpPr>
+          <p:cNvPr id="77" name="文本框 76">
+            <a:extLst>
+              <a:ext uri="{FF2B5EF4-FFF2-40B4-BE49-F238E27FC236}">
+                <a16:creationId xmlns:a16="http://schemas.microsoft.com/office/drawing/2014/main" id="{BE416108-03E4-858E-04F0-4F7923865D5C}"/>
+              </a:ext>
+            </a:extLst>
+          </p:cNvPr>
+          <p:cNvSpPr txBox="1"/>
+          <p:nvPr/>
+        </p:nvSpPr>
+        <p:spPr>
+          <a:xfrm>
+            <a:off x="11112501" y="1172152"/>
+            <a:ext cx="171061" cy="276999"/>
+          </a:xfrm>
+          <a:prstGeom prst="rect">
+            <a:avLst/>
+          </a:prstGeom>
+          <a:noFill/>
+        </p:spPr>
+        <p:txBody>
+          <a:bodyPr wrap="square" rtlCol="0">
+            <a:spAutoFit/>
+          </a:bodyPr>
+          <a:lstStyle/>
+          <a:p>
+            <a:r>
+              <a:rPr lang="en-US" altLang="zh-CN" sz="1200" dirty="0"/>
+              <a:t>7</a:t>
+            </a:r>
+            <a:endParaRPr lang="zh-CN" altLang="en-US" sz="1200" dirty="0"/>
+          </a:p>
+        </p:txBody>
+      </p:sp>
+      <p:sp>
+        <p:nvSpPr>
+          <p:cNvPr id="78" name="矩形 77">
+            <a:extLst>
+              <a:ext uri="{FF2B5EF4-FFF2-40B4-BE49-F238E27FC236}">
+                <a16:creationId xmlns:a16="http://schemas.microsoft.com/office/drawing/2014/main" id="{BC45CBCE-4304-4AD3-A10E-409620158124}"/>
+              </a:ext>
+            </a:extLst>
+          </p:cNvPr>
+          <p:cNvSpPr/>
+          <p:nvPr/>
+        </p:nvSpPr>
+        <p:spPr>
+          <a:xfrm>
+            <a:off x="5869021" y="1027879"/>
+            <a:ext cx="2436282" cy="704636"/>
+          </a:xfrm>
+          <a:prstGeom prst="rect">
+            <a:avLst/>
+          </a:prstGeom>
+        </p:spPr>
+        <p:style>
+          <a:lnRef idx="2">
+            <a:schemeClr val="accent1">
+              <a:shade val="15000"/>
+            </a:schemeClr>
+          </a:lnRef>
+          <a:fillRef idx="1">
+            <a:schemeClr val="accent1"/>
+          </a:fillRef>
+          <a:effectRef idx="0">
+            <a:schemeClr val="accent1"/>
+          </a:effectRef>
+          <a:fontRef idx="minor">
+            <a:schemeClr val="lt1"/>
+          </a:fontRef>
+        </p:style>
+        <p:txBody>
+          <a:bodyPr rtlCol="0" anchor="ctr"/>
+          <a:lstStyle/>
+          <a:p>
+            <a:pPr algn="ctr"/>
+            <a:endParaRPr lang="zh-CN" altLang="en-US"/>
+          </a:p>
+        </p:txBody>
+      </p:sp>
+      <p:sp>
+        <p:nvSpPr>
+          <p:cNvPr id="79" name="箭头: 下 78">
+            <a:extLst>
+              <a:ext uri="{FF2B5EF4-FFF2-40B4-BE49-F238E27FC236}">
+                <a16:creationId xmlns:a16="http://schemas.microsoft.com/office/drawing/2014/main" id="{08B21885-2D1C-21B2-603A-E36CC153285A}"/>
+              </a:ext>
+            </a:extLst>
+          </p:cNvPr>
+          <p:cNvSpPr/>
+          <p:nvPr/>
+        </p:nvSpPr>
+        <p:spPr>
+          <a:xfrm rot="10800000">
+            <a:off x="6702087" y="1767561"/>
+            <a:ext cx="640098" cy="160383"/>
+          </a:xfrm>
+          <a:prstGeom prst="downArrow">
+            <a:avLst/>
+          </a:prstGeom>
+        </p:spPr>
+        <p:style>
+          <a:lnRef idx="2">
+            <a:schemeClr val="accent6">
+              <a:shade val="15000"/>
+            </a:schemeClr>
+          </a:lnRef>
+          <a:fillRef idx="1">
+            <a:schemeClr val="accent6"/>
+          </a:fillRef>
+          <a:effectRef idx="0">
+            <a:schemeClr val="accent6"/>
+          </a:effectRef>
+          <a:fontRef idx="minor">
+            <a:schemeClr val="lt1"/>
+          </a:fontRef>
+        </p:style>
+        <p:txBody>
+          <a:bodyPr rtlCol="0" anchor="ctr"/>
+          <a:lstStyle/>
+          <a:p>
+            <a:pPr algn="ctr"/>
+            <a:endParaRPr lang="zh-CN" altLang="en-US"/>
+          </a:p>
+        </p:txBody>
+      </p:sp>
+      <p:sp>
+        <p:nvSpPr>
+          <p:cNvPr id="80" name="矩形 79">
+            <a:extLst>
+              <a:ext uri="{FF2B5EF4-FFF2-40B4-BE49-F238E27FC236}">
+                <a16:creationId xmlns:a16="http://schemas.microsoft.com/office/drawing/2014/main" id="{6DF9F9BF-F8BA-3FE0-AB81-87022E50B70D}"/>
+              </a:ext>
+            </a:extLst>
+          </p:cNvPr>
+          <p:cNvSpPr/>
+          <p:nvPr/>
+        </p:nvSpPr>
+        <p:spPr>
+          <a:xfrm>
+            <a:off x="6169667" y="5738537"/>
+            <a:ext cx="2692369" cy="977608"/>
+          </a:xfrm>
+          <a:prstGeom prst="rect">
+            <a:avLst/>
+          </a:prstGeom>
+        </p:spPr>
+        <p:style>
+          <a:lnRef idx="2">
+            <a:schemeClr val="accent4"/>
+          </a:lnRef>
+          <a:fillRef idx="1">
+            <a:schemeClr val="lt1"/>
+          </a:fillRef>
+          <a:effectRef idx="0">
+            <a:schemeClr val="accent4"/>
+          </a:effectRef>
+          <a:fontRef idx="minor">
+            <a:schemeClr val="dk1"/>
+          </a:fontRef>
+        </p:style>
+        <p:txBody>
+          <a:bodyPr rtlCol="0" anchor="ctr"/>
+          <a:lstStyle/>
+          <a:p>
+            <a:pPr algn="ctr"/>
+            <a:endParaRPr lang="zh-CN" altLang="en-US"/>
+          </a:p>
+        </p:txBody>
+      </p:sp>
+      <p:sp>
+        <p:nvSpPr>
+          <p:cNvPr id="81" name="矩形 80">
+            <a:extLst>
+              <a:ext uri="{FF2B5EF4-FFF2-40B4-BE49-F238E27FC236}">
+                <a16:creationId xmlns:a16="http://schemas.microsoft.com/office/drawing/2014/main" id="{01576ACD-394C-E837-AB44-FDD2ED9C85D9}"/>
+              </a:ext>
+            </a:extLst>
+          </p:cNvPr>
+          <p:cNvSpPr/>
+          <p:nvPr/>
+        </p:nvSpPr>
+        <p:spPr>
+          <a:xfrm>
+            <a:off x="9040396" y="6469828"/>
+            <a:ext cx="3080208" cy="332590"/>
+          </a:xfrm>
+          <a:prstGeom prst="rect">
+            <a:avLst/>
+          </a:prstGeom>
+        </p:spPr>
+        <p:style>
+          <a:lnRef idx="2">
+            <a:schemeClr val="accent4"/>
+          </a:lnRef>
+          <a:fillRef idx="1">
+            <a:schemeClr val="lt1"/>
+          </a:fillRef>
+          <a:effectRef idx="0">
+            <a:schemeClr val="accent4"/>
+          </a:effectRef>
+          <a:fontRef idx="minor">
+            <a:schemeClr val="dk1"/>
+          </a:fontRef>
+        </p:style>
+        <p:txBody>
+          <a:bodyPr rtlCol="0" anchor="ctr"/>
+          <a:lstStyle>
+            <a:defPPr>
+              <a:defRPr lang="zh-CN"/>
+            </a:defPPr>
+            <a:lvl1pPr marL="0" algn="l" defTabSz="914400" rtl="0" eaLnBrk="1" latinLnBrk="0" hangingPunct="1">
+              <a:defRPr sz="1800" kern="1200">
+                <a:solidFill>
+                  <a:schemeClr val="dk1"/>
+                </a:solidFill>
+                <a:latin typeface="+mn-lt"/>
+                <a:ea typeface="+mn-ea"/>
+                <a:cs typeface="+mn-cs"/>
+              </a:defRPr>
+            </a:lvl1pPr>
+            <a:lvl2pPr marL="457200" algn="l" defTabSz="914400" rtl="0" eaLnBrk="1" latinLnBrk="0" hangingPunct="1">
+              <a:defRPr sz="1800" kern="1200">
+                <a:solidFill>
+                  <a:schemeClr val="dk1"/>
+                </a:solidFill>
+                <a:latin typeface="+mn-lt"/>
+                <a:ea typeface="+mn-ea"/>
+                <a:cs typeface="+mn-cs"/>
+              </a:defRPr>
+            </a:lvl2pPr>
+            <a:lvl3pPr marL="914400" algn="l" defTabSz="914400" rtl="0" eaLnBrk="1" latinLnBrk="0" hangingPunct="1">
+              <a:defRPr sz="1800" kern="1200">
+                <a:solidFill>
+                  <a:schemeClr val="dk1"/>
+                </a:solidFill>
+                <a:latin typeface="+mn-lt"/>
+                <a:ea typeface="+mn-ea"/>
+                <a:cs typeface="+mn-cs"/>
+              </a:defRPr>
+            </a:lvl3pPr>
+            <a:lvl4pPr marL="1371600" algn="l" defTabSz="914400" rtl="0" eaLnBrk="1" latinLnBrk="0" hangingPunct="1">
+              <a:defRPr sz="1800" kern="1200">
+                <a:solidFill>
+                  <a:schemeClr val="dk1"/>
+                </a:solidFill>
+                <a:latin typeface="+mn-lt"/>
+                <a:ea typeface="+mn-ea"/>
+                <a:cs typeface="+mn-cs"/>
+              </a:defRPr>
+            </a:lvl4pPr>
+            <a:lvl5pPr marL="1828800" algn="l" defTabSz="914400" rtl="0" eaLnBrk="1" latinLnBrk="0" hangingPunct="1">
+              <a:defRPr sz="1800" kern="1200">
+                <a:solidFill>
+                  <a:schemeClr val="dk1"/>
+                </a:solidFill>
+                <a:latin typeface="+mn-lt"/>
+                <a:ea typeface="+mn-ea"/>
+                <a:cs typeface="+mn-cs"/>
+              </a:defRPr>
+            </a:lvl5pPr>
+            <a:lvl6pPr marL="2286000" algn="l" defTabSz="914400" rtl="0" eaLnBrk="1" latinLnBrk="0" hangingPunct="1">
+              <a:defRPr sz="1800" kern="1200">
+                <a:solidFill>
+                  <a:schemeClr val="dk1"/>
+                </a:solidFill>
+                <a:latin typeface="+mn-lt"/>
+                <a:ea typeface="+mn-ea"/>
+                <a:cs typeface="+mn-cs"/>
+              </a:defRPr>
+            </a:lvl6pPr>
+            <a:lvl7pPr marL="2743200" algn="l" defTabSz="914400" rtl="0" eaLnBrk="1" latinLnBrk="0" hangingPunct="1">
+              <a:defRPr sz="1800" kern="1200">
+                <a:solidFill>
+                  <a:schemeClr val="dk1"/>
+                </a:solidFill>
+                <a:latin typeface="+mn-lt"/>
+                <a:ea typeface="+mn-ea"/>
+                <a:cs typeface="+mn-cs"/>
+              </a:defRPr>
+            </a:lvl7pPr>
+            <a:lvl8pPr marL="3200400" algn="l" defTabSz="914400" rtl="0" eaLnBrk="1" latinLnBrk="0" hangingPunct="1">
+              <a:defRPr sz="1800" kern="1200">
+                <a:solidFill>
+                  <a:schemeClr val="dk1"/>
+                </a:solidFill>
+                <a:latin typeface="+mn-lt"/>
+                <a:ea typeface="+mn-ea"/>
+                <a:cs typeface="+mn-cs"/>
+              </a:defRPr>
+            </a:lvl8pPr>
+            <a:lvl9pPr marL="3657600" algn="l" defTabSz="914400" rtl="0" eaLnBrk="1" latinLnBrk="0" hangingPunct="1">
+              <a:defRPr sz="1800" kern="1200">
+                <a:solidFill>
+                  <a:schemeClr val="dk1"/>
+                </a:solidFill>
+                <a:latin typeface="+mn-lt"/>
+                <a:ea typeface="+mn-ea"/>
+                <a:cs typeface="+mn-cs"/>
+              </a:defRPr>
+            </a:lvl9pPr>
+          </a:lstStyle>
           <a:p>
             <a:pPr algn="ctr"/>
             <a:endParaRPr lang="zh-CN" altLang="en-US"/>

--- a/docs/overview.pptx
+++ b/docs/overview.pptx
@@ -5,10 +5,11 @@
     <p:sldMasterId id="2147483648" r:id="rId1"/>
   </p:sldMasterIdLst>
   <p:notesMasterIdLst>
-    <p:notesMasterId r:id="rId3"/>
+    <p:notesMasterId r:id="rId4"/>
   </p:notesMasterIdLst>
   <p:sldIdLst>
-    <p:sldId id="256" r:id="rId2"/>
+    <p:sldId id="257" r:id="rId2"/>
+    <p:sldId id="256" r:id="rId3"/>
   </p:sldIdLst>
   <p:sldSz cx="12192000" cy="6858000"/>
   <p:notesSz cx="6858000" cy="9144000"/>
@@ -529,7 +530,7 @@
           <a:p>
             <a:fld id="{6AB730D5-1C7C-4557-8722-3813F1ECD0F3}" type="slidenum">
               <a:rPr lang="zh-CN" altLang="en-US" smtClean="0"/>
-              <a:t>1</a:t>
+              <a:t>2</a:t>
             </a:fld>
             <a:endParaRPr lang="zh-CN" altLang="en-US"/>
           </a:p>
@@ -3764,6 +3765,132 @@
       </p:grpSpPr>
       <p:sp>
         <p:nvSpPr>
+          <p:cNvPr id="2" name="标题 1">
+            <a:extLst>
+              <a:ext uri="{FF2B5EF4-FFF2-40B4-BE49-F238E27FC236}">
+                <a16:creationId xmlns:a16="http://schemas.microsoft.com/office/drawing/2014/main" id="{B70B98E8-F404-42E7-CA06-370C9587E8B3}"/>
+              </a:ext>
+            </a:extLst>
+          </p:cNvPr>
+          <p:cNvSpPr>
+            <a:spLocks noGrp="1"/>
+          </p:cNvSpPr>
+          <p:nvPr>
+            <p:ph type="title"/>
+          </p:nvPr>
+        </p:nvSpPr>
+        <p:spPr/>
+        <p:txBody>
+          <a:bodyPr/>
+          <a:lstStyle/>
+          <a:p>
+            <a:r>
+              <a:rPr lang="en-US" altLang="zh-CN" dirty="0">
+                <a:latin typeface="Noto Sans SC Black" panose="020B0200000000000000" pitchFamily="34" charset="-122"/>
+                <a:ea typeface="Noto Sans SC Black" panose="020B0200000000000000" pitchFamily="34" charset="-122"/>
+              </a:rPr>
+              <a:t>AMAR ENGINE</a:t>
+            </a:r>
+            <a:endParaRPr lang="zh-CN" altLang="en-US" dirty="0">
+              <a:latin typeface="Noto Sans SC Black" panose="020B0200000000000000" pitchFamily="34" charset="-122"/>
+              <a:ea typeface="Noto Sans SC Black" panose="020B0200000000000000" pitchFamily="34" charset="-122"/>
+            </a:endParaRPr>
+          </a:p>
+        </p:txBody>
+      </p:sp>
+      <p:sp>
+        <p:nvSpPr>
+          <p:cNvPr id="3" name="内容占位符 2">
+            <a:extLst>
+              <a:ext uri="{FF2B5EF4-FFF2-40B4-BE49-F238E27FC236}">
+                <a16:creationId xmlns:a16="http://schemas.microsoft.com/office/drawing/2014/main" id="{0731B3ED-CEF1-2C3A-C2D1-88C17296BFEE}"/>
+              </a:ext>
+            </a:extLst>
+          </p:cNvPr>
+          <p:cNvSpPr>
+            <a:spLocks noGrp="1"/>
+          </p:cNvSpPr>
+          <p:nvPr>
+            <p:ph idx="1"/>
+          </p:nvPr>
+        </p:nvSpPr>
+        <p:spPr/>
+        <p:txBody>
+          <a:bodyPr/>
+          <a:lstStyle/>
+          <a:p>
+            <a:endParaRPr lang="zh-CN" altLang="en-US" dirty="0"/>
+          </a:p>
+        </p:txBody>
+      </p:sp>
+      <p:pic>
+        <p:nvPicPr>
+          <p:cNvPr id="4" name="图片 3" descr="徽标, 公司名称&#10;&#10;AI 生成的内容可能不正确。">
+            <a:extLst>
+              <a:ext uri="{FF2B5EF4-FFF2-40B4-BE49-F238E27FC236}">
+                <a16:creationId xmlns:a16="http://schemas.microsoft.com/office/drawing/2014/main" id="{1185C566-0941-CCAE-731E-B1D0F3C298BF}"/>
+              </a:ext>
+            </a:extLst>
+          </p:cNvPr>
+          <p:cNvPicPr>
+            <a:picLocks noChangeAspect="1"/>
+          </p:cNvPicPr>
+          <p:nvPr/>
+        </p:nvPicPr>
+        <p:blipFill>
+          <a:blip r:embed="rId2">
+            <a:extLst>
+              <a:ext uri="{28A0092B-C50C-407E-A947-70E740481C1C}">
+                <a14:useLocalDpi xmlns:a14="http://schemas.microsoft.com/office/drawing/2010/main" val="0"/>
+              </a:ext>
+            </a:extLst>
+          </a:blip>
+          <a:stretch>
+            <a:fillRect/>
+          </a:stretch>
+        </p:blipFill>
+        <p:spPr>
+          <a:xfrm>
+            <a:off x="4979505" y="87313"/>
+            <a:ext cx="1670843" cy="1670843"/>
+          </a:xfrm>
+          <a:prstGeom prst="rect">
+            <a:avLst/>
+          </a:prstGeom>
+        </p:spPr>
+      </p:pic>
+    </p:spTree>
+    <p:extLst>
+      <p:ext uri="{BB962C8B-B14F-4D97-AF65-F5344CB8AC3E}">
+        <p14:creationId xmlns:p14="http://schemas.microsoft.com/office/powerpoint/2010/main" val="1316474239"/>
+      </p:ext>
+    </p:extLst>
+  </p:cSld>
+  <p:clrMapOvr>
+    <a:masterClrMapping/>
+  </p:clrMapOvr>
+</p:sld>
+</file>
+
+<file path=ppt/slides/slide2.xml><?xml version="1.0" encoding="utf-8"?>
+<p:sld xmlns:a="http://schemas.openxmlformats.org/drawingml/2006/main" xmlns:r="http://schemas.openxmlformats.org/officeDocument/2006/relationships" xmlns:p="http://schemas.openxmlformats.org/presentationml/2006/main">
+  <p:cSld>
+    <p:spTree>
+      <p:nvGrpSpPr>
+        <p:cNvPr id="1" name=""/>
+        <p:cNvGrpSpPr/>
+        <p:nvPr/>
+      </p:nvGrpSpPr>
+      <p:grpSpPr>
+        <a:xfrm>
+          <a:off x="0" y="0"/>
+          <a:ext cx="0" cy="0"/>
+          <a:chOff x="0" y="0"/>
+          <a:chExt cx="0" cy="0"/>
+        </a:xfrm>
+      </p:grpSpPr>
+      <p:sp>
+        <p:nvSpPr>
           <p:cNvPr id="62" name="矩形 61">
             <a:extLst>
               <a:ext uri="{FF2B5EF4-FFF2-40B4-BE49-F238E27FC236}">
@@ -7081,6 +7208,123 @@
           <a:p>
             <a:pPr algn="ctr"/>
             <a:endParaRPr lang="zh-CN" altLang="en-US"/>
+          </a:p>
+        </p:txBody>
+      </p:sp>
+      <p:sp>
+        <p:nvSpPr>
+          <p:cNvPr id="83" name="文本框 82">
+            <a:extLst>
+              <a:ext uri="{FF2B5EF4-FFF2-40B4-BE49-F238E27FC236}">
+                <a16:creationId xmlns:a16="http://schemas.microsoft.com/office/drawing/2014/main" id="{3D2D27DB-7E96-825E-563C-1541A22C23BA}"/>
+              </a:ext>
+            </a:extLst>
+          </p:cNvPr>
+          <p:cNvSpPr txBox="1"/>
+          <p:nvPr/>
+        </p:nvSpPr>
+        <p:spPr>
+          <a:xfrm>
+            <a:off x="5938838" y="1108075"/>
+            <a:ext cx="2265916" cy="369332"/>
+          </a:xfrm>
+          <a:prstGeom prst="rect">
+            <a:avLst/>
+          </a:prstGeom>
+          <a:noFill/>
+        </p:spPr>
+        <p:txBody>
+          <a:bodyPr wrap="square" rtlCol="0">
+            <a:spAutoFit/>
+          </a:bodyPr>
+          <a:lstStyle/>
+          <a:p>
+            <a:r>
+              <a:rPr lang="zh-CN" altLang="en-US" dirty="0"/>
+              <a:t>开始构建</a:t>
+            </a:r>
+          </a:p>
+        </p:txBody>
+      </p:sp>
+      <p:sp>
+        <p:nvSpPr>
+          <p:cNvPr id="84" name="椭圆 83">
+            <a:extLst>
+              <a:ext uri="{FF2B5EF4-FFF2-40B4-BE49-F238E27FC236}">
+                <a16:creationId xmlns:a16="http://schemas.microsoft.com/office/drawing/2014/main" id="{EE675F6B-D8E9-A1D8-9456-A4790EFF5AB1}"/>
+              </a:ext>
+            </a:extLst>
+          </p:cNvPr>
+          <p:cNvSpPr/>
+          <p:nvPr/>
+        </p:nvSpPr>
+        <p:spPr>
+          <a:xfrm>
+            <a:off x="8040197" y="1074265"/>
+            <a:ext cx="165100" cy="177800"/>
+          </a:xfrm>
+          <a:prstGeom prst="ellipse">
+            <a:avLst/>
+          </a:prstGeom>
+        </p:spPr>
+        <p:style>
+          <a:lnRef idx="2">
+            <a:schemeClr val="accent2">
+              <a:shade val="15000"/>
+            </a:schemeClr>
+          </a:lnRef>
+          <a:fillRef idx="1">
+            <a:schemeClr val="accent2"/>
+          </a:fillRef>
+          <a:effectRef idx="0">
+            <a:schemeClr val="accent2"/>
+          </a:effectRef>
+          <a:fontRef idx="minor">
+            <a:schemeClr val="lt1"/>
+          </a:fontRef>
+        </p:style>
+        <p:txBody>
+          <a:bodyPr rtlCol="0" anchor="ctr"/>
+          <a:lstStyle/>
+          <a:p>
+            <a:pPr algn="ctr"/>
+            <a:endParaRPr lang="zh-CN" altLang="en-US"/>
+          </a:p>
+        </p:txBody>
+      </p:sp>
+      <p:sp>
+        <p:nvSpPr>
+          <p:cNvPr id="85" name="文本框 84">
+            <a:extLst>
+              <a:ext uri="{FF2B5EF4-FFF2-40B4-BE49-F238E27FC236}">
+                <a16:creationId xmlns:a16="http://schemas.microsoft.com/office/drawing/2014/main" id="{E6CC673A-296F-5205-F152-5407116CFFE8}"/>
+              </a:ext>
+            </a:extLst>
+          </p:cNvPr>
+          <p:cNvSpPr txBox="1"/>
+          <p:nvPr/>
+        </p:nvSpPr>
+        <p:spPr>
+          <a:xfrm>
+            <a:off x="8043564" y="1024206"/>
+            <a:ext cx="94908" cy="276999"/>
+          </a:xfrm>
+          <a:prstGeom prst="rect">
+            <a:avLst/>
+          </a:prstGeom>
+          <a:noFill/>
+        </p:spPr>
+        <p:txBody>
+          <a:bodyPr wrap="square" rtlCol="0">
+            <a:spAutoFit/>
+          </a:bodyPr>
+          <a:lstStyle/>
+          <a:p>
+            <a:r>
+              <a:rPr lang="en-US" altLang="zh-CN" sz="1200" dirty="0"/>
+              <a:t>6</a:t>
+            </a:r>
+            <a:endParaRPr lang="zh-CN" altLang="en-US" sz="1200" dirty="0"/>
           </a:p>
         </p:txBody>
       </p:sp>
